--- a/rokko_sewage_council/output/六戸町_第2回審議会資料_別紙_R7決算突合.pptx
+++ b/rokko_sewage_council/output/六戸町_第2回審議会資料_別紙_R7決算突合.pptx
@@ -2188,7 +2188,7 @@
                 <a:latin typeface="Noto Sans CJK JP"/>
                 <a:cs typeface="Noto Sans CJK JP"/>
               </a:rPr>
-              <a:t>  • 農集の一般会計繰入金が推計の約2.7倍である理由と今後の方針</a:t>
+              <a:t>  • 令和8年度以降の維持管理費の見込み（流域下水道負担金63,707千円等）</a:t>
             </a:r>
           </a:p>
         </p:txBody>
@@ -2790,7 +2790,7 @@
                 <a:latin typeface="Noto Sans CJK JP"/>
                 <a:cs typeface="Noto Sans CJK JP"/>
               </a:rPr>
-              <a:t>  • 有収水量・調定口数の実績／一般会計繰入金の繰入基準別内訳</a:t>
+              <a:t>  • 有収水量・調定口数の実績／企業債の元利償還見通し</a:t>
             </a:r>
           </a:p>
         </p:txBody>
@@ -2879,8 +2879,8 @@
         </p:nvSpPr>
         <p:spPr>
           <a:xfrm>
-            <a:off x="571680" y="4930000"/>
-            <a:ext cx="11048400" cy="1122171"/>
+            <a:off x="571680" y="4909566"/>
+            <a:ext cx="11048400" cy="1600962"/>
           </a:xfrm>
           <a:custGeom>
             <a:avLst/>
@@ -2943,6 +2943,19 @@
                 <a:cs typeface="Noto Sans CJK JP"/>
               </a:rPr>
               <a:t>▶ 本別紙の数値は令和7年度決算（合計残高試算表・貸借対照表／令和8年3月31日、出力 令和8年6月16日）に基づきます。本編（37ページ）の収支シミュレーションは経営戦略の推計値ベースのままとしており、決算実績を反映して組み直すかどうかは審議会でのご判断を踏まえて対応します。</a:t>
+            </a:r>
+          </a:p>
+          <a:p>
+            <a:pPr algn="l"/>
+            <a:r>
+              <a:rPr lang="ja-JP" sz="1300" b="0" dirty="0">
+                <a:solidFill>
+                  <a:srgbClr val="78350F"/>
+                </a:solidFill>
+                <a:latin typeface="Noto Sans CJK JP"/>
+                <a:cs typeface="Noto Sans CJK JP"/>
+              </a:rPr>
+              <a:t>▶ 農集の一般会計繰入金が決算51,777千円と推計19,236千円の約2.7倍となっているのは基準外繰入金を含むためです。別紙2の試算は経営戦略の前提（基準内繰入＝資本費相当）によっています。</a:t>
             </a:r>
           </a:p>
           <a:p>
@@ -8278,7 +8291,7 @@
                 <a:latin typeface="Arial"/>
                 <a:cs typeface="Noto Sans CJK JP"/>
               </a:rPr>
-              <a:t>▶ 農集は使用料収入が決算11,604千円と推計を22.5%下回る一方、一般会計繰入金が推計の約2.7倍でした。経常収支比率が112.6%となっているのはこのためです。※ 出所：R7公共／農集 合計残高試算表（令和8年3月31日）。</a:t>
+              <a:t>▶ 農集は使用料収入が決算11,604千円と推計を22.5%下回る一方、一般会計繰入金は51,777千円と推計の約2.7倍でした。これは基準外繰入金を含むためで、経常収支比率が112.6%となっているのはこの繰入によるものです。※ 出所：R7公共／農集 合計残高試算表（令和8年3月31日）。</a:t>
             </a:r>
           </a:p>
         </p:txBody>
@@ -10777,7 +10790,7 @@
                 <a:latin typeface="Arial"/>
                 <a:cs typeface="Noto Sans CJK JP"/>
               </a:rPr>
-              <a:t>経常収支比率（目標：単年度100%以上）　※（ ）内は本編の値／一般会計繰入金は経営戦略の前提（資本費相当）</a:t>
+              <a:t>経常収支比率（目標：単年度100%以上）　※（ ）内は本編の値／一般会計繰入金は経営戦略の前提（基準内繰入＝資本費相当）</a:t>
             </a:r>
           </a:p>
         </p:txBody>
@@ -12893,7 +12906,7 @@
                 <a:latin typeface="Arial"/>
                 <a:cs typeface="Noto Sans CJK JP"/>
               </a:rPr>
-              <a:t>▶ 経常収支比率は一般会計繰入金の前提に左右されます。上表は経営戦略の前提（資本費相当）によるもので、農集の繰入金をR7実績水準（51,777千円）で置いた場合はR9で110〜111%となります。※ 有収水量・調定口数の実績が未受領のため暫定値です。</a:t>
+              <a:t>▶ 経常収支比率は一般会計繰入金の前提に左右されます。上表は経営戦略の前提（基準内繰入＝資本費相当）によるものです。農集のR7実績51,777千円は基準外繰入金を含むため、この水準が将来も続くと置いた場合はR9で110〜111%となります。※ 有収水量・調定口数の実績が未受領のため暫定値です。</a:t>
             </a:r>
           </a:p>
         </p:txBody>

--- a/rokko_sewage_council/output/六戸町_第2回審議会資料_別紙_R7決算突合.pptx
+++ b/rokko_sewage_council/output/六戸町_第2回審議会資料_別紙_R7決算突合.pptx
@@ -1369,14 +1369,14 @@
       </p:sp>
       <p:sp>
         <p:nvSpPr>
-          <p:cNvPr id="15" name="hdr_txt"/>
-          <p:cNvSpPr/>
-          <p:nvPr/>
-        </p:nvSpPr>
-        <p:spPr>
-          <a:xfrm>
-            <a:off x="961920" y="181080"/>
-            <a:ext cx="10909735" cy="381240"/>
+          <p:cNvPr id="16" name="ttl"/>
+          <p:cNvSpPr/>
+          <p:nvPr/>
+        </p:nvSpPr>
+        <p:spPr>
+          <a:xfrm>
+            <a:off x="819360" y="722376"/>
+            <a:ext cx="11052295" cy="700000"/>
           </a:xfrm>
           <a:custGeom>
             <a:avLst/>
@@ -1422,95 +1422,21 @@
           <a:fontRef idx="minor"/>
         </p:style>
         <p:txBody>
-          <a:bodyPr lIns="0" tIns="45720" rIns="0" bIns="45720" anchor="ctr">
+          <a:bodyPr lIns="0" tIns="45720" rIns="114300" bIns="45720" anchor="ctr">
             <a:noAutofit/>
           </a:bodyPr>
           <a:lstStyle/>
           <a:p>
             <a:pPr algn="l"/>
             <a:r>
-              <a:rPr lang="ja-JP" sz="2100" b="0" dirty="0">
+              <a:rPr lang="ja-JP" sz="2700" b="0" dirty="0">
                 <a:solidFill>
                   <a:srgbClr val="1E293B"/>
                 </a:solidFill>
                 <a:latin typeface="Arial"/>
                 <a:cs typeface="Noto Sans CJK JP"/>
               </a:rPr>
-              <a:t>参考資料　別紙3　決算突合を踏まえた確認事項の整理</a:t>
-            </a:r>
-          </a:p>
-        </p:txBody>
-      </p:sp>
-      <p:sp>
-        <p:nvSpPr>
-          <p:cNvPr id="16" name="ttl"/>
-          <p:cNvSpPr/>
-          <p:nvPr/>
-        </p:nvSpPr>
-        <p:spPr>
-          <a:xfrm>
-            <a:off x="819360" y="850000"/>
-            <a:ext cx="11052295" cy="700000"/>
-          </a:xfrm>
-          <a:custGeom>
-            <a:avLst/>
-            <a:gdLst/>
-            <a:ahLst/>
-            <a:cxnLst/>
-            <a:rect l="l" t="t" r="r" b="b"/>
-            <a:pathLst>
-              <a:path w="21600" h="21600">
-                <a:moveTo>
-                  <a:pt x="0" y="0"/>
-                </a:moveTo>
-                <a:lnTo>
-                  <a:pt x="21600" y="0"/>
-                </a:lnTo>
-                <a:lnTo>
-                  <a:pt x="21600" y="21600"/>
-                </a:lnTo>
-                <a:lnTo>
-                  <a:pt x="0" y="21600"/>
-                </a:lnTo>
-                <a:close/>
-              </a:path>
-            </a:pathLst>
-          </a:custGeom>
-          <a:solidFill>
-            <a:srgbClr val="FFFFFF"/>
-          </a:solidFill>
-          <a:ln w="0">
-            <a:noFill/>
-          </a:ln>
-        </p:spPr>
-        <p:style>
-          <a:lnRef idx="0">
-            <a:scrgbClr r="0" g="0" b="0"/>
-          </a:lnRef>
-          <a:fillRef idx="0">
-            <a:scrgbClr r="0" g="0" b="0"/>
-          </a:fillRef>
-          <a:effectRef idx="0">
-            <a:scrgbClr r="0" g="0" b="0"/>
-          </a:effectRef>
-          <a:fontRef idx="minor"/>
-        </p:style>
-        <p:txBody>
-          <a:bodyPr lIns="0" tIns="45720" rIns="114300" bIns="45720" anchor="ctr">
-            <a:noAutofit/>
-          </a:bodyPr>
-          <a:lstStyle/>
-          <a:p>
-            <a:pPr algn="l"/>
-            <a:r>
-              <a:rPr lang="ja-JP" sz="2700" b="0" dirty="0">
-                <a:solidFill>
-                  <a:srgbClr val="1E293B"/>
-                </a:solidFill>
-                <a:latin typeface="Arial"/>
-                <a:cs typeface="Noto Sans CJK JP"/>
-              </a:rPr>
-              <a:t>令和7年度決算により決着した事項と、引き続き確認が必要な事項</a:t>
+              <a:t>別紙3　令和7年度決算により決着した事項と、引き続き確認が必要な事項</a:t>
             </a:r>
           </a:p>
         </p:txBody>
@@ -3082,40 +3008,40 @@
       </p:grpSpPr>
       <p:sp>
         <p:nvSpPr>
-          <p:cNvPr id="10" name="hb"/>
-          <p:cNvSpPr/>
-          <p:nvPr/>
-        </p:nvSpPr>
-        <p:spPr>
-          <a:xfrm>
-            <a:off x="0" y="0"/>
-            <a:ext cx="12191760" cy="570000"/>
-          </a:xfrm>
-          <a:custGeom>
-            <a:avLst/>
-            <a:gdLst/>
-            <a:ahLst/>
-            <a:rect l="l" t="t" r="r" b="b"/>
-            <a:pathLst>
-              <a:path w="21600" h="21600">
-                <a:moveTo>
-                  <a:pt x="0" y="0"/>
-                </a:moveTo>
-                <a:lnTo>
-                  <a:pt x="21600" y="0"/>
-                </a:lnTo>
-                <a:lnTo>
-                  <a:pt x="21600" y="21600"/>
-                </a:lnTo>
-                <a:lnTo>
-                  <a:pt x="0" y="21600"/>
-                </a:lnTo>
-                <a:close/>
-              </a:path>
-            </a:pathLst>
-          </a:custGeom>
-          <a:solidFill>
-            <a:srgbClr val="1E293B"/>
+          <p:cNvPr id="11" name="hl"/>
+          <p:cNvSpPr/>
+          <p:nvPr/>
+        </p:nvSpPr>
+        <p:spPr>
+          <a:xfrm>
+            <a:off x="0" y="18288"/>
+            <a:ext cx="12191760" cy="19080"/>
+          </a:xfrm>
+          <a:custGeom>
+            <a:avLst/>
+            <a:gdLst/>
+            <a:ahLst/>
+            <a:rect l="l" t="t" r="r" b="b"/>
+            <a:pathLst>
+              <a:path w="21600" h="21600">
+                <a:moveTo>
+                  <a:pt x="0" y="0"/>
+                </a:moveTo>
+                <a:lnTo>
+                  <a:pt x="21600" y="0"/>
+                </a:lnTo>
+                <a:lnTo>
+                  <a:pt x="21600" y="21600"/>
+                </a:lnTo>
+                <a:lnTo>
+                  <a:pt x="0" y="21600"/>
+                </a:lnTo>
+                <a:close/>
+              </a:path>
+            </a:pathLst>
+          </a:custGeom>
+          <a:solidFill>
+            <a:srgbClr val="E2E8F0"/>
           </a:solidFill>
           <a:ln w="0">
             <a:noFill/>
@@ -3128,60 +3054,50 @@
           <a:fontRef idx="minor"/>
         </p:style>
         <p:txBody>
-          <a:bodyPr tIns="91440" bIns="91440" lIns="182880" rIns="91440" anchor="ctr">
-            <a:noAutofit/>
-          </a:bodyPr>
-          <a:p>
-            <a:pPr algn="l"/>
-            <a:r>
-              <a:rPr lang="ja-JP" sz="1700" b="0" dirty="0">
-                <a:solidFill>
-                  <a:srgbClr val="FFFFFF"/>
-                </a:solidFill>
-                <a:latin typeface="Arial"/>
-                <a:cs typeface="Noto Sans CJK JP"/>
-              </a:rPr>
-              <a:t>  参考資料　別紙1　令和7年度決算と推計値の突合（主要科目）</a:t>
-            </a:r>
-          </a:p>
-        </p:txBody>
-      </p:sp>
-      <p:sp>
-        <p:nvSpPr>
-          <p:cNvPr id="11" name="hl"/>
-          <p:cNvSpPr/>
-          <p:nvPr/>
-        </p:nvSpPr>
-        <p:spPr>
-          <a:xfrm>
-            <a:off x="0" y="570000"/>
-            <a:ext cx="12191760" cy="19080"/>
-          </a:xfrm>
-          <a:custGeom>
-            <a:avLst/>
-            <a:gdLst/>
-            <a:ahLst/>
-            <a:rect l="l" t="t" r="r" b="b"/>
-            <a:pathLst>
-              <a:path w="21600" h="21600">
-                <a:moveTo>
-                  <a:pt x="0" y="0"/>
-                </a:moveTo>
-                <a:lnTo>
-                  <a:pt x="21600" y="0"/>
-                </a:lnTo>
-                <a:lnTo>
-                  <a:pt x="21600" y="21600"/>
-                </a:lnTo>
-                <a:lnTo>
-                  <a:pt x="0" y="21600"/>
-                </a:lnTo>
-                <a:close/>
-              </a:path>
-            </a:pathLst>
-          </a:custGeom>
-          <a:solidFill>
-            <a:srgbClr val="3B82F6"/>
+          <a:bodyPr tIns="45720" bIns="45720" lIns="91440" rIns="91440" anchor="ctr">
+            <a:noAutofit/>
+          </a:bodyPr>
+          <a:p>
+            <a:endParaRPr/>
+          </a:p>
+        </p:txBody>
+      </p:sp>
+      <p:sp>
+        <p:nvSpPr>
+          <p:cNvPr id="12" name="ha"/>
+          <p:cNvSpPr/>
+          <p:nvPr/>
+        </p:nvSpPr>
+        <p:spPr>
+          <a:xfrm>
+            <a:off x="0" y="18288"/>
+            <a:ext cx="1904760" cy="38520"/>
+          </a:xfrm>
+          <a:custGeom>
+            <a:avLst/>
+            <a:gdLst/>
+            <a:ahLst/>
+            <a:rect l="l" t="t" r="r" b="b"/>
+            <a:pathLst>
+              <a:path w="21600" h="21600">
+                <a:moveTo>
+                  <a:pt x="0" y="0"/>
+                </a:moveTo>
+                <a:lnTo>
+                  <a:pt x="21600" y="0"/>
+                </a:lnTo>
+                <a:lnTo>
+                  <a:pt x="21600" y="21600"/>
+                </a:lnTo>
+                <a:lnTo>
+                  <a:pt x="0" y="21600"/>
+                </a:lnTo>
+                <a:close/>
+              </a:path>
+            </a:pathLst>
+          </a:custGeom>
+          <a:solidFill>
+            <a:srgbClr val="1E3A8A"/>
           </a:solidFill>
           <a:ln w="0">
             <a:noFill/>
@@ -3204,40 +3120,40 @@
       </p:sp>
       <p:sp>
         <p:nvSpPr>
-          <p:cNvPr id="12" name="ha"/>
-          <p:cNvSpPr/>
-          <p:nvPr/>
-        </p:nvSpPr>
-        <p:spPr>
-          <a:xfrm>
-            <a:off x="0" y="570000"/>
-            <a:ext cx="1904760" cy="38520"/>
-          </a:xfrm>
-          <a:custGeom>
-            <a:avLst/>
-            <a:gdLst/>
-            <a:ahLst/>
-            <a:rect l="l" t="t" r="r" b="b"/>
-            <a:pathLst>
-              <a:path w="21600" h="21600">
-                <a:moveTo>
-                  <a:pt x="0" y="0"/>
-                </a:moveTo>
-                <a:lnTo>
-                  <a:pt x="21600" y="0"/>
-                </a:lnTo>
-                <a:lnTo>
-                  <a:pt x="21600" y="21600"/>
-                </a:lnTo>
-                <a:lnTo>
-                  <a:pt x="0" y="21600"/>
-                </a:lnTo>
-                <a:close/>
-              </a:path>
-            </a:pathLst>
-          </a:custGeom>
-          <a:solidFill>
-            <a:srgbClr val="1E3A8A"/>
+          <p:cNvPr id="13" name="ttl"/>
+          <p:cNvSpPr/>
+          <p:nvPr/>
+        </p:nvSpPr>
+        <p:spPr>
+          <a:xfrm>
+            <a:off x="571680" y="722376"/>
+            <a:ext cx="11301984" cy="520000"/>
+          </a:xfrm>
+          <a:custGeom>
+            <a:avLst/>
+            <a:gdLst/>
+            <a:ahLst/>
+            <a:rect l="l" t="t" r="r" b="b"/>
+            <a:pathLst>
+              <a:path w="21600" h="21600">
+                <a:moveTo>
+                  <a:pt x="0" y="0"/>
+                </a:moveTo>
+                <a:lnTo>
+                  <a:pt x="21600" y="0"/>
+                </a:lnTo>
+                <a:lnTo>
+                  <a:pt x="21600" y="21600"/>
+                </a:lnTo>
+                <a:lnTo>
+                  <a:pt x="0" y="21600"/>
+                </a:lnTo>
+                <a:close/>
+              </a:path>
+            </a:pathLst>
+          </a:custGeom>
+          <a:solidFill>
+            <a:srgbClr val="F8FAFC"/>
           </a:solidFill>
           <a:ln w="0">
             <a:noFill/>
@@ -3250,62 +3166,6 @@
           <a:fontRef idx="minor"/>
         </p:style>
         <p:txBody>
-          <a:bodyPr tIns="45720" bIns="45720" lIns="91440" rIns="91440" anchor="ctr">
-            <a:noAutofit/>
-          </a:bodyPr>
-          <a:p>
-            <a:endParaRPr/>
-          </a:p>
-        </p:txBody>
-      </p:sp>
-      <p:sp>
-        <p:nvSpPr>
-          <p:cNvPr id="13" name="ttl"/>
-          <p:cNvSpPr/>
-          <p:nvPr/>
-        </p:nvSpPr>
-        <p:spPr>
-          <a:xfrm>
-            <a:off x="571680" y="720000"/>
-            <a:ext cx="11301984" cy="520000"/>
-          </a:xfrm>
-          <a:custGeom>
-            <a:avLst/>
-            <a:gdLst/>
-            <a:ahLst/>
-            <a:rect l="l" t="t" r="r" b="b"/>
-            <a:pathLst>
-              <a:path w="21600" h="21600">
-                <a:moveTo>
-                  <a:pt x="0" y="0"/>
-                </a:moveTo>
-                <a:lnTo>
-                  <a:pt x="21600" y="0"/>
-                </a:lnTo>
-                <a:lnTo>
-                  <a:pt x="21600" y="21600"/>
-                </a:lnTo>
-                <a:lnTo>
-                  <a:pt x="0" y="21600"/>
-                </a:lnTo>
-                <a:close/>
-              </a:path>
-            </a:pathLst>
-          </a:custGeom>
-          <a:solidFill>
-            <a:srgbClr val="F8FAFC"/>
-          </a:solidFill>
-          <a:ln w="0">
-            <a:noFill/>
-          </a:ln>
-        </p:spPr>
-        <p:style>
-          <a:lnRef idx="0"/>
-          <a:fillRef idx="0"/>
-          <a:effectRef idx="0"/>
-          <a:fontRef idx="minor"/>
-        </p:style>
-        <p:txBody>
           <a:bodyPr tIns="45720" bIns="45720" lIns="0" rIns="91440" anchor="ctr">
             <a:noAutofit/>
           </a:bodyPr>
@@ -3319,7 +3179,7 @@
                 <a:latin typeface="Arial"/>
                 <a:cs typeface="Noto Sans CJK JP"/>
               </a:rPr>
-              <a:t>令和7年度決算と経営戦略推計値の突合　主要科目（単位：千円）</a:t>
+              <a:t>別紙1　令和7年度決算と経営戦略推計値の突合　主要科目（単位：千円）</a:t>
             </a:r>
           </a:p>
         </p:txBody>
@@ -8399,40 +8259,40 @@
       </p:grpSpPr>
       <p:sp>
         <p:nvSpPr>
-          <p:cNvPr id="10" name="hb"/>
-          <p:cNvSpPr/>
-          <p:nvPr/>
-        </p:nvSpPr>
-        <p:spPr>
-          <a:xfrm>
-            <a:off x="0" y="0"/>
-            <a:ext cx="12191760" cy="570000"/>
-          </a:xfrm>
-          <a:custGeom>
-            <a:avLst/>
-            <a:gdLst/>
-            <a:ahLst/>
-            <a:rect l="l" t="t" r="r" b="b"/>
-            <a:pathLst>
-              <a:path w="21600" h="21600">
-                <a:moveTo>
-                  <a:pt x="0" y="0"/>
-                </a:moveTo>
-                <a:lnTo>
-                  <a:pt x="21600" y="0"/>
-                </a:lnTo>
-                <a:lnTo>
-                  <a:pt x="21600" y="21600"/>
-                </a:lnTo>
-                <a:lnTo>
-                  <a:pt x="0" y="21600"/>
-                </a:lnTo>
-                <a:close/>
-              </a:path>
-            </a:pathLst>
-          </a:custGeom>
-          <a:solidFill>
-            <a:srgbClr val="1E293B"/>
+          <p:cNvPr id="11" name="hl"/>
+          <p:cNvSpPr/>
+          <p:nvPr/>
+        </p:nvSpPr>
+        <p:spPr>
+          <a:xfrm>
+            <a:off x="0" y="18288"/>
+            <a:ext cx="12191760" cy="19080"/>
+          </a:xfrm>
+          <a:custGeom>
+            <a:avLst/>
+            <a:gdLst/>
+            <a:ahLst/>
+            <a:rect l="l" t="t" r="r" b="b"/>
+            <a:pathLst>
+              <a:path w="21600" h="21600">
+                <a:moveTo>
+                  <a:pt x="0" y="0"/>
+                </a:moveTo>
+                <a:lnTo>
+                  <a:pt x="21600" y="0"/>
+                </a:lnTo>
+                <a:lnTo>
+                  <a:pt x="21600" y="21600"/>
+                </a:lnTo>
+                <a:lnTo>
+                  <a:pt x="0" y="21600"/>
+                </a:lnTo>
+                <a:close/>
+              </a:path>
+            </a:pathLst>
+          </a:custGeom>
+          <a:solidFill>
+            <a:srgbClr val="E2E8F0"/>
           </a:solidFill>
           <a:ln w="0">
             <a:noFill/>
@@ -8445,60 +8305,50 @@
           <a:fontRef idx="minor"/>
         </p:style>
         <p:txBody>
-          <a:bodyPr tIns="91440" bIns="91440" lIns="182880" rIns="91440" anchor="ctr">
-            <a:noAutofit/>
-          </a:bodyPr>
-          <a:p>
-            <a:pPr algn="l"/>
-            <a:r>
-              <a:rPr lang="ja-JP" sz="1700" b="0" dirty="0">
-                <a:solidFill>
-                  <a:srgbClr val="FFFFFF"/>
-                </a:solidFill>
-                <a:latin typeface="Arial"/>
-                <a:cs typeface="Noto Sans CJK JP"/>
-              </a:rPr>
-              <a:t>  参考資料　別紙2　決算を起点に組み直した場合の指標（試算）</a:t>
-            </a:r>
-          </a:p>
-        </p:txBody>
-      </p:sp>
-      <p:sp>
-        <p:nvSpPr>
-          <p:cNvPr id="11" name="hl"/>
-          <p:cNvSpPr/>
-          <p:nvPr/>
-        </p:nvSpPr>
-        <p:spPr>
-          <a:xfrm>
-            <a:off x="0" y="570000"/>
-            <a:ext cx="12191760" cy="19080"/>
-          </a:xfrm>
-          <a:custGeom>
-            <a:avLst/>
-            <a:gdLst/>
-            <a:ahLst/>
-            <a:rect l="l" t="t" r="r" b="b"/>
-            <a:pathLst>
-              <a:path w="21600" h="21600">
-                <a:moveTo>
-                  <a:pt x="0" y="0"/>
-                </a:moveTo>
-                <a:lnTo>
-                  <a:pt x="21600" y="0"/>
-                </a:lnTo>
-                <a:lnTo>
-                  <a:pt x="21600" y="21600"/>
-                </a:lnTo>
-                <a:lnTo>
-                  <a:pt x="0" y="21600"/>
-                </a:lnTo>
-                <a:close/>
-              </a:path>
-            </a:pathLst>
-          </a:custGeom>
-          <a:solidFill>
-            <a:srgbClr val="3B82F6"/>
+          <a:bodyPr tIns="45720" bIns="45720" lIns="91440" rIns="91440" anchor="ctr">
+            <a:noAutofit/>
+          </a:bodyPr>
+          <a:p>
+            <a:endParaRPr/>
+          </a:p>
+        </p:txBody>
+      </p:sp>
+      <p:sp>
+        <p:nvSpPr>
+          <p:cNvPr id="12" name="ha"/>
+          <p:cNvSpPr/>
+          <p:nvPr/>
+        </p:nvSpPr>
+        <p:spPr>
+          <a:xfrm>
+            <a:off x="0" y="18288"/>
+            <a:ext cx="1904760" cy="38520"/>
+          </a:xfrm>
+          <a:custGeom>
+            <a:avLst/>
+            <a:gdLst/>
+            <a:ahLst/>
+            <a:rect l="l" t="t" r="r" b="b"/>
+            <a:pathLst>
+              <a:path w="21600" h="21600">
+                <a:moveTo>
+                  <a:pt x="0" y="0"/>
+                </a:moveTo>
+                <a:lnTo>
+                  <a:pt x="21600" y="0"/>
+                </a:lnTo>
+                <a:lnTo>
+                  <a:pt x="21600" y="21600"/>
+                </a:lnTo>
+                <a:lnTo>
+                  <a:pt x="0" y="21600"/>
+                </a:lnTo>
+                <a:close/>
+              </a:path>
+            </a:pathLst>
+          </a:custGeom>
+          <a:solidFill>
+            <a:srgbClr val="1E3A8A"/>
           </a:solidFill>
           <a:ln w="0">
             <a:noFill/>
@@ -8521,40 +8371,40 @@
       </p:sp>
       <p:sp>
         <p:nvSpPr>
-          <p:cNvPr id="12" name="ha"/>
-          <p:cNvSpPr/>
-          <p:nvPr/>
-        </p:nvSpPr>
-        <p:spPr>
-          <a:xfrm>
-            <a:off x="0" y="570000"/>
-            <a:ext cx="1904760" cy="38520"/>
-          </a:xfrm>
-          <a:custGeom>
-            <a:avLst/>
-            <a:gdLst/>
-            <a:ahLst/>
-            <a:rect l="l" t="t" r="r" b="b"/>
-            <a:pathLst>
-              <a:path w="21600" h="21600">
-                <a:moveTo>
-                  <a:pt x="0" y="0"/>
-                </a:moveTo>
-                <a:lnTo>
-                  <a:pt x="21600" y="0"/>
-                </a:lnTo>
-                <a:lnTo>
-                  <a:pt x="21600" y="21600"/>
-                </a:lnTo>
-                <a:lnTo>
-                  <a:pt x="0" y="21600"/>
-                </a:lnTo>
-                <a:close/>
-              </a:path>
-            </a:pathLst>
-          </a:custGeom>
-          <a:solidFill>
-            <a:srgbClr val="1E3A8A"/>
+          <p:cNvPr id="13" name="ttl"/>
+          <p:cNvSpPr/>
+          <p:nvPr/>
+        </p:nvSpPr>
+        <p:spPr>
+          <a:xfrm>
+            <a:off x="571680" y="720000"/>
+            <a:ext cx="11299975" cy="520000"/>
+          </a:xfrm>
+          <a:custGeom>
+            <a:avLst/>
+            <a:gdLst/>
+            <a:ahLst/>
+            <a:rect l="l" t="t" r="r" b="b"/>
+            <a:pathLst>
+              <a:path w="21600" h="21600">
+                <a:moveTo>
+                  <a:pt x="0" y="0"/>
+                </a:moveTo>
+                <a:lnTo>
+                  <a:pt x="21600" y="0"/>
+                </a:lnTo>
+                <a:lnTo>
+                  <a:pt x="21600" y="21600"/>
+                </a:lnTo>
+                <a:lnTo>
+                  <a:pt x="0" y="21600"/>
+                </a:lnTo>
+                <a:close/>
+              </a:path>
+            </a:pathLst>
+          </a:custGeom>
+          <a:solidFill>
+            <a:srgbClr val="F8FAFC"/>
           </a:solidFill>
           <a:ln w="0">
             <a:noFill/>
@@ -8567,62 +8417,6 @@
           <a:fontRef idx="minor"/>
         </p:style>
         <p:txBody>
-          <a:bodyPr tIns="45720" bIns="45720" lIns="91440" rIns="91440" anchor="ctr">
-            <a:noAutofit/>
-          </a:bodyPr>
-          <a:p>
-            <a:endParaRPr/>
-          </a:p>
-        </p:txBody>
-      </p:sp>
-      <p:sp>
-        <p:nvSpPr>
-          <p:cNvPr id="13" name="ttl"/>
-          <p:cNvSpPr/>
-          <p:nvPr/>
-        </p:nvSpPr>
-        <p:spPr>
-          <a:xfrm>
-            <a:off x="571680" y="720000"/>
-            <a:ext cx="11299975" cy="520000"/>
-          </a:xfrm>
-          <a:custGeom>
-            <a:avLst/>
-            <a:gdLst/>
-            <a:ahLst/>
-            <a:rect l="l" t="t" r="r" b="b"/>
-            <a:pathLst>
-              <a:path w="21600" h="21600">
-                <a:moveTo>
-                  <a:pt x="0" y="0"/>
-                </a:moveTo>
-                <a:lnTo>
-                  <a:pt x="21600" y="0"/>
-                </a:lnTo>
-                <a:lnTo>
-                  <a:pt x="21600" y="21600"/>
-                </a:lnTo>
-                <a:lnTo>
-                  <a:pt x="0" y="21600"/>
-                </a:lnTo>
-                <a:close/>
-              </a:path>
-            </a:pathLst>
-          </a:custGeom>
-          <a:solidFill>
-            <a:srgbClr val="F8FAFC"/>
-          </a:solidFill>
-          <a:ln w="0">
-            <a:noFill/>
-          </a:ln>
-        </p:spPr>
-        <p:style>
-          <a:lnRef idx="0"/>
-          <a:fillRef idx="0"/>
-          <a:effectRef idx="0"/>
-          <a:fontRef idx="minor"/>
-        </p:style>
-        <p:txBody>
           <a:bodyPr tIns="45720" bIns="45720" lIns="0" rIns="91440" anchor="ctr">
             <a:noAutofit/>
           </a:bodyPr>
@@ -8636,7 +8430,7 @@
                 <a:latin typeface="Arial"/>
                 <a:cs typeface="Noto Sans CJK JP"/>
               </a:rPr>
-              <a:t>令和7年度決算を起点に組み直した場合の指標　2か年改定・試算</a:t>
+              <a:t>別紙2　令和7年度決算を起点に組み直した場合の指標　2か年改定・試算</a:t>
             </a:r>
           </a:p>
         </p:txBody>

--- a/rokko_sewage_council/output/六戸町_第2回審議会資料_別紙_R7決算突合.pptx
+++ b/rokko_sewage_council/output/六戸町_第2回審議会資料_別紙_R7決算突合.pptx
@@ -116,6 +116,764 @@
 </p:presentation>
 </file>
 
+<file path=ppt/notesMasters/notesMaster1.xml><?xml version="1.0" encoding="utf-8"?>
+<p:notesMaster xmlns:a="http://schemas.openxmlformats.org/drawingml/2006/main" xmlns:p="http://schemas.openxmlformats.org/presentationml/2006/main" xmlns:r="http://schemas.openxmlformats.org/officeDocument/2006/relationships">
+  <p:cSld>
+    <p:bg>
+      <p:bgRef idx="1001">
+        <a:schemeClr val="bg1"/>
+      </p:bgRef>
+    </p:bg>
+    <p:spTree>
+      <p:nvGrpSpPr>
+        <p:cNvPr id="1" name=""/>
+        <p:cNvGrpSpPr/>
+        <p:nvPr/>
+      </p:nvGrpSpPr>
+      <p:grpSpPr>
+        <a:xfrm>
+          <a:off x="0" y="0"/>
+          <a:ext cx="0" cy="0"/>
+          <a:chOff x="0" y="0"/>
+          <a:chExt cx="0" cy="0"/>
+        </a:xfrm>
+      </p:grpSpPr>
+      <p:sp>
+        <p:nvSpPr>
+          <p:cNvPr id="2" name="Header Placeholder 1"/>
+          <p:cNvSpPr>
+            <a:spLocks noGrp="1"/>
+          </p:cNvSpPr>
+          <p:nvPr>
+            <p:ph type="hdr" sz="quarter"/>
+          </p:nvPr>
+        </p:nvSpPr>
+        <p:spPr>
+          <a:xfrm>
+            <a:off x="0" y="0"/>
+            <a:ext cx="2971800" cy="457200"/>
+          </a:xfrm>
+          <a:prstGeom prst="rect">
+            <a:avLst/>
+          </a:prstGeom>
+        </p:spPr>
+        <p:txBody>
+          <a:bodyPr vert="horz" lIns="91440" tIns="45720" rIns="91440" bIns="45720" rtlCol="0"/>
+          <a:lstStyle>
+            <a:lvl1pPr algn="l">
+              <a:defRPr sz="1200"/>
+            </a:lvl1pPr>
+          </a:lstStyle>
+          <a:p>
+            <a:endParaRPr lang="en-US"/>
+          </a:p>
+        </p:txBody>
+      </p:sp>
+      <p:sp>
+        <p:nvSpPr>
+          <p:cNvPr id="3" name="Date Placeholder 2"/>
+          <p:cNvSpPr>
+            <a:spLocks noGrp="1"/>
+          </p:cNvSpPr>
+          <p:nvPr>
+            <p:ph type="dt" idx="1"/>
+          </p:nvPr>
+        </p:nvSpPr>
+        <p:spPr>
+          <a:xfrm>
+            <a:off x="3884613" y="0"/>
+            <a:ext cx="2971800" cy="457200"/>
+          </a:xfrm>
+          <a:prstGeom prst="rect">
+            <a:avLst/>
+          </a:prstGeom>
+        </p:spPr>
+        <p:txBody>
+          <a:bodyPr vert="horz" lIns="91440" tIns="45720" rIns="91440" bIns="45720" rtlCol="0"/>
+          <a:lstStyle>
+            <a:lvl1pPr algn="r">
+              <a:defRPr sz="1200"/>
+            </a:lvl1pPr>
+          </a:lstStyle>
+          <a:p>
+            <a:fld id="{0F89C1C7-3DCD-1040-A9CF-14679D8B5DDD}" type="datetimeFigureOut">
+              <a:rPr lang="en-US" smtClean="0"/>
+              <a:t>10/17/16</a:t>
+            </a:fld>
+            <a:endParaRPr lang="en-US"/>
+          </a:p>
+        </p:txBody>
+      </p:sp>
+      <p:sp>
+        <p:nvSpPr>
+          <p:cNvPr id="4" name="Slide Image Placeholder 3"/>
+          <p:cNvSpPr>
+            <a:spLocks noGrp="1" noRot="1" noChangeAspect="1"/>
+          </p:cNvSpPr>
+          <p:nvPr>
+            <p:ph type="sldImg" idx="2"/>
+          </p:nvPr>
+        </p:nvSpPr>
+        <p:spPr>
+          <a:xfrm>
+            <a:off x="1143000" y="685800"/>
+            <a:ext cx="4572000" cy="3429000"/>
+          </a:xfrm>
+          <a:prstGeom prst="rect">
+            <a:avLst/>
+          </a:prstGeom>
+          <a:noFill/>
+          <a:ln w="12700">
+            <a:solidFill>
+              <a:prstClr val="black"/>
+            </a:solidFill>
+          </a:ln>
+        </p:spPr>
+        <p:txBody>
+          <a:bodyPr vert="horz" lIns="91440" tIns="45720" rIns="91440" bIns="45720" rtlCol="0" anchor="ctr"/>
+          <a:lstStyle/>
+          <a:p>
+            <a:endParaRPr lang="en-US"/>
+          </a:p>
+        </p:txBody>
+      </p:sp>
+      <p:sp>
+        <p:nvSpPr>
+          <p:cNvPr id="5" name="Notes Placeholder 4"/>
+          <p:cNvSpPr>
+            <a:spLocks noGrp="1"/>
+          </p:cNvSpPr>
+          <p:nvPr>
+            <p:ph type="body" sz="quarter" idx="3"/>
+          </p:nvPr>
+        </p:nvSpPr>
+        <p:spPr>
+          <a:xfrm>
+            <a:off x="685800" y="4343400"/>
+            <a:ext cx="5486400" cy="4114800"/>
+          </a:xfrm>
+          <a:prstGeom prst="rect">
+            <a:avLst/>
+          </a:prstGeom>
+        </p:spPr>
+        <p:txBody>
+          <a:bodyPr vert="horz" lIns="91440" tIns="45720" rIns="91440" bIns="45720" rtlCol="0"/>
+          <a:lstStyle/>
+          <a:p>
+            <a:pPr lvl="0"/>
+            <a:r>
+              <a:rPr lang="en-US" smtClean="0"/>
+              <a:t>Click to edit Master text styles</a:t>
+            </a:r>
+          </a:p>
+          <a:p>
+            <a:pPr lvl="1"/>
+            <a:r>
+              <a:rPr lang="en-US" smtClean="0"/>
+              <a:t>Second level</a:t>
+            </a:r>
+          </a:p>
+          <a:p>
+            <a:pPr lvl="2"/>
+            <a:r>
+              <a:rPr lang="en-US" smtClean="0"/>
+              <a:t>Third level</a:t>
+            </a:r>
+          </a:p>
+          <a:p>
+            <a:pPr lvl="3"/>
+            <a:r>
+              <a:rPr lang="en-US" smtClean="0"/>
+              <a:t>Fourth level</a:t>
+            </a:r>
+          </a:p>
+          <a:p>
+            <a:pPr lvl="4"/>
+            <a:r>
+              <a:rPr lang="en-US" smtClean="0"/>
+              <a:t>Fifth level</a:t>
+            </a:r>
+            <a:endParaRPr lang="en-US"/>
+          </a:p>
+        </p:txBody>
+      </p:sp>
+      <p:sp>
+        <p:nvSpPr>
+          <p:cNvPr id="6" name="Footer Placeholder 5"/>
+          <p:cNvSpPr>
+            <a:spLocks noGrp="1"/>
+          </p:cNvSpPr>
+          <p:nvPr>
+            <p:ph type="ftr" sz="quarter" idx="4"/>
+          </p:nvPr>
+        </p:nvSpPr>
+        <p:spPr>
+          <a:xfrm>
+            <a:off x="0" y="8685213"/>
+            <a:ext cx="2971800" cy="457200"/>
+          </a:xfrm>
+          <a:prstGeom prst="rect">
+            <a:avLst/>
+          </a:prstGeom>
+        </p:spPr>
+        <p:txBody>
+          <a:bodyPr vert="horz" lIns="91440" tIns="45720" rIns="91440" bIns="45720" rtlCol="0" anchor="b"/>
+          <a:lstStyle>
+            <a:lvl1pPr algn="l">
+              <a:defRPr sz="1200"/>
+            </a:lvl1pPr>
+          </a:lstStyle>
+          <a:p>
+            <a:endParaRPr lang="en-US"/>
+          </a:p>
+        </p:txBody>
+      </p:sp>
+      <p:sp>
+        <p:nvSpPr>
+          <p:cNvPr id="7" name="Slide Number Placeholder 6"/>
+          <p:cNvSpPr>
+            <a:spLocks noGrp="1"/>
+          </p:cNvSpPr>
+          <p:nvPr>
+            <p:ph type="sldNum" sz="quarter" idx="5"/>
+          </p:nvPr>
+        </p:nvSpPr>
+        <p:spPr>
+          <a:xfrm>
+            <a:off x="3884613" y="8685213"/>
+            <a:ext cx="2971800" cy="457200"/>
+          </a:xfrm>
+          <a:prstGeom prst="rect">
+            <a:avLst/>
+          </a:prstGeom>
+        </p:spPr>
+        <p:txBody>
+          <a:bodyPr vert="horz" lIns="91440" tIns="45720" rIns="91440" bIns="45720" rtlCol="0" anchor="b"/>
+          <a:lstStyle>
+            <a:lvl1pPr algn="r">
+              <a:defRPr sz="1200"/>
+            </a:lvl1pPr>
+          </a:lstStyle>
+          <a:p>
+            <a:fld id="{BB5E49A5-4136-284D-997B-48E1D791AD67}" type="slidenum">
+              <a:rPr lang="en-US" smtClean="0"/>
+              <a:t>‹#›</a:t>
+            </a:fld>
+            <a:endParaRPr lang="en-US"/>
+          </a:p>
+        </p:txBody>
+      </p:sp>
+    </p:spTree>
+    <p:extLst>
+      <p:ext uri="{BB962C8B-B14F-4D97-AF65-F5344CB8AC3E}">
+        <p14:creationId xmlns:p14="http://schemas.microsoft.com/office/powerpoint/2010/main" val="2623252185"/>
+      </p:ext>
+    </p:extLst>
+  </p:cSld>
+  <p:clrMap bg1="lt1" tx1="dk1" bg2="lt2" tx2="dk2" accent1="accent1" accent2="accent2" accent3="accent3" accent4="accent4" accent5="accent5" accent6="accent6" hlink="hlink" folHlink="folHlink"/>
+  <p:notesStyle>
+    <a:lvl1pPr marL="0" algn="l" defTabSz="457200" rtl="0" eaLnBrk="1" latinLnBrk="0" hangingPunct="1">
+      <a:defRPr sz="1200" kern="1200">
+        <a:solidFill>
+          <a:schemeClr val="tx1"/>
+        </a:solidFill>
+        <a:latin typeface="+mn-lt"/>
+        <a:ea typeface="+mn-ea"/>
+        <a:cs typeface="+mn-cs"/>
+      </a:defRPr>
+    </a:lvl1pPr>
+    <a:lvl2pPr marL="457200" algn="l" defTabSz="457200" rtl="0" eaLnBrk="1" latinLnBrk="0" hangingPunct="1">
+      <a:defRPr sz="1200" kern="1200">
+        <a:solidFill>
+          <a:schemeClr val="tx1"/>
+        </a:solidFill>
+        <a:latin typeface="+mn-lt"/>
+        <a:ea typeface="+mn-ea"/>
+        <a:cs typeface="+mn-cs"/>
+      </a:defRPr>
+    </a:lvl2pPr>
+    <a:lvl3pPr marL="914400" algn="l" defTabSz="457200" rtl="0" eaLnBrk="1" latinLnBrk="0" hangingPunct="1">
+      <a:defRPr sz="1200" kern="1200">
+        <a:solidFill>
+          <a:schemeClr val="tx1"/>
+        </a:solidFill>
+        <a:latin typeface="+mn-lt"/>
+        <a:ea typeface="+mn-ea"/>
+        <a:cs typeface="+mn-cs"/>
+      </a:defRPr>
+    </a:lvl3pPr>
+    <a:lvl4pPr marL="1371600" algn="l" defTabSz="457200" rtl="0" eaLnBrk="1" latinLnBrk="0" hangingPunct="1">
+      <a:defRPr sz="1200" kern="1200">
+        <a:solidFill>
+          <a:schemeClr val="tx1"/>
+        </a:solidFill>
+        <a:latin typeface="+mn-lt"/>
+        <a:ea typeface="+mn-ea"/>
+        <a:cs typeface="+mn-cs"/>
+      </a:defRPr>
+    </a:lvl4pPr>
+    <a:lvl5pPr marL="1828800" algn="l" defTabSz="457200" rtl="0" eaLnBrk="1" latinLnBrk="0" hangingPunct="1">
+      <a:defRPr sz="1200" kern="1200">
+        <a:solidFill>
+          <a:schemeClr val="tx1"/>
+        </a:solidFill>
+        <a:latin typeface="+mn-lt"/>
+        <a:ea typeface="+mn-ea"/>
+        <a:cs typeface="+mn-cs"/>
+      </a:defRPr>
+    </a:lvl5pPr>
+    <a:lvl6pPr marL="2286000" algn="l" defTabSz="457200" rtl="0" eaLnBrk="1" latinLnBrk="0" hangingPunct="1">
+      <a:defRPr sz="1200" kern="1200">
+        <a:solidFill>
+          <a:schemeClr val="tx1"/>
+        </a:solidFill>
+        <a:latin typeface="+mn-lt"/>
+        <a:ea typeface="+mn-ea"/>
+        <a:cs typeface="+mn-cs"/>
+      </a:defRPr>
+    </a:lvl6pPr>
+    <a:lvl7pPr marL="2743200" algn="l" defTabSz="457200" rtl="0" eaLnBrk="1" latinLnBrk="0" hangingPunct="1">
+      <a:defRPr sz="1200" kern="1200">
+        <a:solidFill>
+          <a:schemeClr val="tx1"/>
+        </a:solidFill>
+        <a:latin typeface="+mn-lt"/>
+        <a:ea typeface="+mn-ea"/>
+        <a:cs typeface="+mn-cs"/>
+      </a:defRPr>
+    </a:lvl7pPr>
+    <a:lvl8pPr marL="3200400" algn="l" defTabSz="457200" rtl="0" eaLnBrk="1" latinLnBrk="0" hangingPunct="1">
+      <a:defRPr sz="1200" kern="1200">
+        <a:solidFill>
+          <a:schemeClr val="tx1"/>
+        </a:solidFill>
+        <a:latin typeface="+mn-lt"/>
+        <a:ea typeface="+mn-ea"/>
+        <a:cs typeface="+mn-cs"/>
+      </a:defRPr>
+    </a:lvl8pPr>
+    <a:lvl9pPr marL="3657600" algn="l" defTabSz="457200" rtl="0" eaLnBrk="1" latinLnBrk="0" hangingPunct="1">
+      <a:defRPr sz="1200" kern="1200">
+        <a:solidFill>
+          <a:schemeClr val="tx1"/>
+        </a:solidFill>
+        <a:latin typeface="+mn-lt"/>
+        <a:ea typeface="+mn-ea"/>
+        <a:cs typeface="+mn-cs"/>
+      </a:defRPr>
+    </a:lvl9pPr>
+  </p:notesStyle>
+</p:notesMaster>
+</file>
+
+<file path=ppt/notesSlides/notesSlide1.xml><?xml version="1.0" encoding="utf-8"?>
+<p:notes xmlns:a="http://schemas.openxmlformats.org/drawingml/2006/main" xmlns:p="http://schemas.openxmlformats.org/presentationml/2006/main" xmlns:r="http://schemas.openxmlformats.org/officeDocument/2006/relationships">
+  <p:cSld>
+    <p:spTree>
+      <p:nvGrpSpPr>
+        <p:cNvPr id="1" name=""/>
+        <p:cNvGrpSpPr/>
+        <p:nvPr/>
+      </p:nvGrpSpPr>
+      <p:grpSpPr>
+        <a:xfrm>
+          <a:off x="0" y="0"/>
+          <a:ext cx="0" cy="0"/>
+          <a:chOff x="0" y="0"/>
+          <a:chExt cx="0" cy="0"/>
+        </a:xfrm>
+      </p:grpSpPr>
+      <p:sp>
+        <p:nvSpPr>
+          <p:cNvPr id="2" name="Slide Image Placeholder 1"/>
+          <p:cNvSpPr>
+            <a:spLocks noGrp="1"/>
+          </p:cNvSpPr>
+          <p:nvPr>
+            <p:ph type="sldImg" idx="2"/>
+          </p:nvPr>
+        </p:nvSpPr>
+        <p:spPr/>
+      </p:sp>
+      <p:sp>
+        <p:nvSpPr>
+          <p:cNvPr id="3" name="Notes Placeholder 2"/>
+          <p:cNvSpPr>
+            <a:spLocks noGrp="1"/>
+          </p:cNvSpPr>
+          <p:nvPr>
+            <p:ph type="body" idx="3" sz="quarter"/>
+          </p:nvPr>
+        </p:nvSpPr>
+        <p:spPr/>
+        <p:txBody>
+          <a:bodyPr/>
+          <a:lstStyle/>
+          <a:p>
+            <a:r>
+              <a:t>【18:36〜18:36／0分30秒】【別紙へ】令和7年度決算の報告</a:t>
+            </a:r>
+          </a:p>
+          <a:p/>
+          <a:p>
+            <a:r>
+              <a:t>ここで一度、別紙をご覧ください。</a:t>
+            </a:r>
+          </a:p>
+          <a:p>
+            <a:r>
+              <a:t>本編の収支シミュレーションは、経営戦略という中期計画の推計値をもとに組み立てております。その令和7年度分について、この8月に決算が確定いたしましたので、推計と実績を突き合わせた結果を先にご報告いたします。</a:t>
+            </a:r>
+          </a:p>
+          <a:p/>
+          <a:p>
+            <a:r>
+              <a:t>― 進行メモ ―</a:t>
+            </a:r>
+          </a:p>
+          <a:p>
+            <a:r>
+              <a:t>・★ ここを先に説明しないと、本編の34.4%と別紙の45.35%で委員が混乱する</a:t>
+            </a:r>
+          </a:p>
+          <a:p>
+            <a:r>
+              <a:t>・「本編の数字は推計値、別紙が実績」と最初にはっきり言い切る</a:t>
+            </a:r>
+          </a:p>
+        </p:txBody>
+      </p:sp>
+      <p:sp>
+        <p:nvSpPr>
+          <p:cNvPr id="4" name="Slide Number Placeholder 3"/>
+          <p:cNvSpPr>
+            <a:spLocks noGrp="1"/>
+          </p:cNvSpPr>
+          <p:nvPr>
+            <p:ph type="sldNum" idx="5" sz="quarter"/>
+          </p:nvPr>
+        </p:nvSpPr>
+        <p:spPr/>
+      </p:sp>
+    </p:spTree>
+  </p:cSld>
+  <p:clrMapOvr>
+    <a:masterClrMapping/>
+  </p:clrMapOvr>
+</p:notes>
+</file>
+
+<file path=ppt/notesSlides/notesSlide2.xml><?xml version="1.0" encoding="utf-8"?>
+<p:notes xmlns:a="http://schemas.openxmlformats.org/drawingml/2006/main" xmlns:p="http://schemas.openxmlformats.org/presentationml/2006/main" xmlns:r="http://schemas.openxmlformats.org/officeDocument/2006/relationships">
+  <p:cSld>
+    <p:spTree>
+      <p:nvGrpSpPr>
+        <p:cNvPr id="1" name=""/>
+        <p:cNvGrpSpPr/>
+        <p:nvPr/>
+      </p:nvGrpSpPr>
+      <p:grpSpPr>
+        <a:xfrm>
+          <a:off x="0" y="0"/>
+          <a:ext cx="0" cy="0"/>
+          <a:chOff x="0" y="0"/>
+          <a:chExt cx="0" cy="0"/>
+        </a:xfrm>
+      </p:grpSpPr>
+      <p:sp>
+        <p:nvSpPr>
+          <p:cNvPr id="2" name="Slide Image Placeholder 1"/>
+          <p:cNvSpPr>
+            <a:spLocks noGrp="1"/>
+          </p:cNvSpPr>
+          <p:nvPr>
+            <p:ph type="sldImg" idx="2"/>
+          </p:nvPr>
+        </p:nvSpPr>
+        <p:spPr/>
+      </p:sp>
+      <p:sp>
+        <p:nvSpPr>
+          <p:cNvPr id="3" name="Notes Placeholder 2"/>
+          <p:cNvSpPr>
+            <a:spLocks noGrp="1"/>
+          </p:cNvSpPr>
+          <p:nvPr>
+            <p:ph type="body" idx="3" sz="quarter"/>
+          </p:nvPr>
+        </p:nvSpPr>
+        <p:spPr/>
+        <p:txBody>
+          <a:bodyPr/>
+          <a:lstStyle/>
+          <a:p>
+            <a:r>
+              <a:t>【18:36〜18:38／2分】別紙1　主要科目の突合</a:t>
+            </a:r>
+          </a:p>
+          <a:p/>
+          <a:p>
+            <a:r>
+              <a:t>別紙1は、令和7年度の推計値と決算実績を並べた表でございます。</a:t>
+            </a:r>
+          </a:p>
+          <a:p>
+            <a:r>
+              <a:t>最も大きな差は、公共下水道の汚水処理費、つまり維持管理費でございます。推計では1億6,833万円を見込んでおりましたが、決算は1億2,514万円で、4,319万円下回りました。令和6年度決算の1億1,950万円と比べますと、増加は4.7%にとどまっております。</a:t>
+            </a:r>
+          </a:p>
+          <a:p>
+            <a:r>
+              <a:t>この結果、経費回収率は推計の34.4%に対し決算では45.35%、経常収支比率は推計98.5%に対し決算104.06%と、いずれも推計より良い数字になっております。</a:t>
+            </a:r>
+          </a:p>
+          <a:p>
+            <a:r>
+              <a:t>農業集落排水につきましては、使用料収入が推計を22.5%下回った一方で、一般会計からの繰入金が推計の約2.7倍となっております。これは基準外の繰入を行っているためで、経常収支比率が112.58%となっているのはこの繰入によるものでございます。</a:t>
+            </a:r>
+          </a:p>
+          <a:p/>
+          <a:p>
+            <a:r>
+              <a:t>― 進行メモ ―</a:t>
+            </a:r>
+          </a:p>
+          <a:p>
+            <a:r>
+              <a:t>・委員が「では改定は不要では」と受け取りかねない。次のページで必ずフォローする</a:t>
+            </a:r>
+          </a:p>
+          <a:p>
+            <a:r>
+              <a:t>・汚水処理費の最大費目は流域下水道管理運営費負担金6,371万円（維持管理費の51%）</a:t>
+            </a:r>
+          </a:p>
+        </p:txBody>
+      </p:sp>
+      <p:sp>
+        <p:nvSpPr>
+          <p:cNvPr id="4" name="Slide Number Placeholder 3"/>
+          <p:cNvSpPr>
+            <a:spLocks noGrp="1"/>
+          </p:cNvSpPr>
+          <p:nvPr>
+            <p:ph type="sldNum" idx="5" sz="quarter"/>
+          </p:nvPr>
+        </p:nvSpPr>
+        <p:spPr/>
+      </p:sp>
+    </p:spTree>
+  </p:cSld>
+  <p:clrMapOvr>
+    <a:masterClrMapping/>
+  </p:clrMapOvr>
+</p:notes>
+</file>
+
+<file path=ppt/notesSlides/notesSlide3.xml><?xml version="1.0" encoding="utf-8"?>
+<p:notes xmlns:a="http://schemas.openxmlformats.org/drawingml/2006/main" xmlns:p="http://schemas.openxmlformats.org/presentationml/2006/main" xmlns:r="http://schemas.openxmlformats.org/officeDocument/2006/relationships">
+  <p:cSld>
+    <p:spTree>
+      <p:nvGrpSpPr>
+        <p:cNvPr id="1" name=""/>
+        <p:cNvGrpSpPr/>
+        <p:nvPr/>
+      </p:nvGrpSpPr>
+      <p:grpSpPr>
+        <a:xfrm>
+          <a:off x="0" y="0"/>
+          <a:ext cx="0" cy="0"/>
+          <a:chOff x="0" y="0"/>
+          <a:chExt cx="0" cy="0"/>
+        </a:xfrm>
+      </p:grpSpPr>
+      <p:sp>
+        <p:nvSpPr>
+          <p:cNvPr id="2" name="Slide Image Placeholder 1"/>
+          <p:cNvSpPr>
+            <a:spLocks noGrp="1"/>
+          </p:cNvSpPr>
+          <p:nvPr>
+            <p:ph type="sldImg" idx="2"/>
+          </p:nvPr>
+        </p:nvSpPr>
+        <p:spPr/>
+      </p:sp>
+      <p:sp>
+        <p:nvSpPr>
+          <p:cNvPr id="3" name="Notes Placeholder 2"/>
+          <p:cNvSpPr>
+            <a:spLocks noGrp="1"/>
+          </p:cNvSpPr>
+          <p:nvPr>
+            <p:ph type="body" idx="3" sz="quarter"/>
+          </p:nvPr>
+        </p:nvSpPr>
+        <p:spPr/>
+        <p:txBody>
+          <a:bodyPr/>
+          <a:lstStyle/>
+          <a:p>
+            <a:r>
+              <a:t>【18:38〜18:40／1分30秒】別紙2　決算を起点とした試算</a:t>
+            </a:r>
+          </a:p>
+          <a:p/>
+          <a:p>
+            <a:r>
+              <a:t>別紙2は、決算を起点に将来を組み直すとどうなるかの試算でございます。</a:t>
+            </a:r>
+          </a:p>
+          <a:p>
+            <a:r>
+              <a:t>公共下水道の経費回収率は、推奨案②で令和9年度に60.6%となり、本編でお示ししている46.1%より高くなります。目標の47%は令和8年度の時点で上回る計算です。</a:t>
+            </a:r>
+          </a:p>
+          <a:p>
+            <a:r>
+              <a:t>一方、農業集落排水は逆で、令和9年度に49.8%と、本編の54.2%より低くなります。使用料収入の下方修正が費用の下方修正を上回るためでございます。</a:t>
+            </a:r>
+          </a:p>
+          <a:p>
+            <a:r>
+              <a:t>ただしこの試算は、令和7年度の1年分の実績を機械的に将来へ引き延ばしたものです。維持管理費が推計を下回った理由が、一時的な繰り延べなのか恒常的なものなのかがまだ確認できておりません。そのため本編の数値は推計値のままとし、この別紙を参考としてお示しする形にしております。</a:t>
+            </a:r>
+          </a:p>
+          <a:p/>
+          <a:p>
+            <a:r>
+              <a:t>― 進行メモ ―</a:t>
+            </a:r>
+          </a:p>
+          <a:p>
+            <a:r>
+              <a:t>・★ 最も突っ込まれやすい箇所。『どちらが正しいのか』への答えを用意しておく</a:t>
+            </a:r>
+          </a:p>
+          <a:p>
+            <a:r>
+              <a:t>・答え方：「実績は実績として事実。ただし1年分では将来の前提にできない。令和8年度の見込みを確認したうえで、次回に反映するかご相談したい」</a:t>
+            </a:r>
+          </a:p>
+        </p:txBody>
+      </p:sp>
+      <p:sp>
+        <p:nvSpPr>
+          <p:cNvPr id="4" name="Slide Number Placeholder 3"/>
+          <p:cNvSpPr>
+            <a:spLocks noGrp="1"/>
+          </p:cNvSpPr>
+          <p:nvPr>
+            <p:ph type="sldNum" idx="5" sz="quarter"/>
+          </p:nvPr>
+        </p:nvSpPr>
+        <p:spPr/>
+      </p:sp>
+    </p:spTree>
+  </p:cSld>
+  <p:clrMapOvr>
+    <a:masterClrMapping/>
+  </p:clrMapOvr>
+</p:notes>
+</file>
+
+<file path=ppt/notesSlides/notesSlide4.xml><?xml version="1.0" encoding="utf-8"?>
+<p:notes xmlns:a="http://schemas.openxmlformats.org/drawingml/2006/main" xmlns:p="http://schemas.openxmlformats.org/presentationml/2006/main" xmlns:r="http://schemas.openxmlformats.org/officeDocument/2006/relationships">
+  <p:cSld>
+    <p:spTree>
+      <p:nvGrpSpPr>
+        <p:cNvPr id="1" name=""/>
+        <p:cNvGrpSpPr/>
+        <p:nvPr/>
+      </p:nvGrpSpPr>
+      <p:grpSpPr>
+        <a:xfrm>
+          <a:off x="0" y="0"/>
+          <a:ext cx="0" cy="0"/>
+          <a:chOff x="0" y="0"/>
+          <a:chExt cx="0" cy="0"/>
+        </a:xfrm>
+      </p:grpSpPr>
+      <p:sp>
+        <p:nvSpPr>
+          <p:cNvPr id="2" name="Slide Image Placeholder 1"/>
+          <p:cNvSpPr>
+            <a:spLocks noGrp="1"/>
+          </p:cNvSpPr>
+          <p:nvPr>
+            <p:ph type="sldImg" idx="2"/>
+          </p:nvPr>
+        </p:nvSpPr>
+        <p:spPr/>
+      </p:sp>
+      <p:sp>
+        <p:nvSpPr>
+          <p:cNvPr id="3" name="Notes Placeholder 2"/>
+          <p:cNvSpPr>
+            <a:spLocks noGrp="1"/>
+          </p:cNvSpPr>
+          <p:nvPr>
+            <p:ph type="body" idx="3" sz="quarter"/>
+          </p:nvPr>
+        </p:nvSpPr>
+        <p:spPr/>
+        <p:txBody>
+          <a:bodyPr/>
+          <a:lstStyle/>
+          <a:p>
+            <a:r>
+              <a:t>【18:40〜18:41／1分】別紙3　確認事項の整理</a:t>
+            </a:r>
+          </a:p>
+          <a:p/>
+          <a:p>
+            <a:r>
+              <a:t>別紙3は、決算により確認できた事項の整理でございます。</a:t>
+            </a:r>
+          </a:p>
+          <a:p>
+            <a:r>
+              <a:t>維持管理費の増加は生じていないこと、農業集落排水の基本使用料の算定方法に誤りがあり訂正が必要なこと、また企業債残高が公共で15億4,800万円、農業集落排水で2億600万円であることなどが確認できました。</a:t>
+            </a:r>
+          </a:p>
+          <a:p>
+            <a:r>
+              <a:t>引き続き確認が必要なのは、維持管理費が推計を下回った理由と、令和8年度以降の見込みでございます。別紙のご説明は以上です。本編にお戻りください。</a:t>
+            </a:r>
+          </a:p>
+          <a:p/>
+          <a:p>
+            <a:r>
+              <a:t>― 進行メモ ―</a:t>
+            </a:r>
+          </a:p>
+          <a:p>
+            <a:r>
+              <a:t>・企業債残高は「今後の更新投資の重さ」を説明する材料。深追いはしない</a:t>
+            </a:r>
+          </a:p>
+        </p:txBody>
+      </p:sp>
+      <p:sp>
+        <p:nvSpPr>
+          <p:cNvPr id="4" name="Slide Number Placeholder 3"/>
+          <p:cNvSpPr>
+            <a:spLocks noGrp="1"/>
+          </p:cNvSpPr>
+          <p:nvPr>
+            <p:ph type="sldNum" idx="5" sz="quarter"/>
+          </p:nvPr>
+        </p:nvSpPr>
+        <p:spPr/>
+      </p:sp>
+    </p:spTree>
+  </p:cSld>
+  <p:clrMapOvr>
+    <a:masterClrMapping/>
+  </p:clrMapOvr>
+</p:notes>
+</file>
+
 <file path=ppt/slideLayouts/slideLayout1.xml><?xml version="1.0" encoding="utf-8"?>
 <p:sldLayout xmlns:a="http://schemas.openxmlformats.org/drawingml/2006/main" xmlns:r="http://schemas.openxmlformats.org/officeDocument/2006/relationships" xmlns:p="http://schemas.openxmlformats.org/presentationml/2006/main" type="blank" preserve="1">
   <p:cSld name="Master1-Office-Theme">
@@ -1022,7 +1780,7 @@
 </p:sldMaster>
 </file>
 
-<file path=ppt/slides/slide10.xml><?xml version="1.0" encoding="utf-8"?>
+<file path=ppt/slides/slide1.xml><?xml version="1.0" encoding="utf-8"?>
 <p:sld xmlns:a="http://schemas.openxmlformats.org/drawingml/2006/main" xmlns:r="http://schemas.openxmlformats.org/officeDocument/2006/relationships" xmlns:p="http://schemas.openxmlformats.org/presentationml/2006/main">
   <p:cSld>
     <p:bg>
@@ -1177,14 +1935,14 @@
       </p:sp>
       <p:sp>
         <p:nvSpPr>
-          <p:cNvPr id="12" name="hdr_bg"/>
+          <p:cNvPr id="20" name="sec_panel"/>
           <p:cNvSpPr/>
           <p:nvPr/>
         </p:nvSpPr>
         <p:spPr>
           <a:xfrm>
             <a:off x="0" y="0"/>
-            <a:ext cx="12191760" cy="742320"/>
+            <a:ext cx="3200000" cy="6858000"/>
           </a:xfrm>
           <a:custGeom>
             <a:avLst/>
@@ -1211,7 +1969,7 @@
             </a:pathLst>
           </a:custGeom>
           <a:solidFill>
-            <a:srgbClr val="FFFFFF"/>
+            <a:srgbClr val="1E3A8A"/>
           </a:solidFill>
           <a:ln w="0">
             <a:noFill/>
@@ -1241,14 +1999,14 @@
       </p:sp>
       <p:sp>
         <p:nvSpPr>
-          <p:cNvPr id="13" name="hdr_line"/>
-          <p:cNvSpPr/>
-          <p:nvPr/>
-        </p:nvSpPr>
-        <p:spPr>
-          <a:xfrm>
-            <a:off x="0" y="19080"/>
-            <a:ext cx="12191760" cy="19080"/>
+          <p:cNvPr id="21" name="sec_num"/>
+          <p:cNvSpPr/>
+          <p:nvPr/>
+        </p:nvSpPr>
+        <p:spPr>
+          <a:xfrm>
+            <a:off x="200000" y="2000000"/>
+            <a:ext cx="2800000" cy="1800000"/>
           </a:xfrm>
           <a:custGeom>
             <a:avLst/>
@@ -1275,7 +2033,7 @@
             </a:pathLst>
           </a:custGeom>
           <a:solidFill>
-            <a:srgbClr val="E2E8F0"/>
+            <a:srgbClr val="1E3A8A"/>
           </a:solidFill>
           <a:ln w="0">
             <a:noFill/>
@@ -1299,20 +2057,30 @@
           </a:bodyPr>
           <a:lstStyle/>
           <a:p>
-            <a:endParaRPr/>
-          </a:p>
-        </p:txBody>
-      </p:sp>
-      <p:sp>
-        <p:nvSpPr>
-          <p:cNvPr id="14" name="hdr_accent"/>
-          <p:cNvSpPr/>
-          <p:nvPr/>
-        </p:nvSpPr>
-        <p:spPr>
-          <a:xfrm>
-            <a:off x="0" y="19080"/>
-            <a:ext cx="1904760" cy="38520"/>
+            <a:pPr algn="ctr"/>
+            <a:r>
+              <a:rPr lang="ja-JP" sz="5400" b="0" dirty="0">
+                <a:solidFill>
+                  <a:srgbClr val="FFFFFF"/>
+                </a:solidFill>
+                <a:latin typeface="Arial"/>
+                <a:cs typeface="Noto Sans CJK JP"/>
+              </a:rPr>
+              <a:t>別紙</a:t>
+            </a:r>
+          </a:p>
+        </p:txBody>
+      </p:sp>
+      <p:sp>
+        <p:nvSpPr>
+          <p:cNvPr id="22" name="sec_lbl"/>
+          <p:cNvSpPr/>
+          <p:nvPr/>
+        </p:nvSpPr>
+        <p:spPr>
+          <a:xfrm>
+            <a:off x="200000" y="3850000"/>
+            <a:ext cx="2800000" cy="400000"/>
           </a:xfrm>
           <a:custGeom>
             <a:avLst/>
@@ -1363,20 +2131,30 @@
           </a:bodyPr>
           <a:lstStyle/>
           <a:p>
-            <a:endParaRPr/>
-          </a:p>
-        </p:txBody>
-      </p:sp>
-      <p:sp>
-        <p:nvSpPr>
-          <p:cNvPr id="16" name="ttl"/>
-          <p:cNvSpPr/>
-          <p:nvPr/>
-        </p:nvSpPr>
-        <p:spPr>
-          <a:xfrm>
-            <a:off x="819360" y="722376"/>
-            <a:ext cx="11052295" cy="700000"/>
+            <a:pPr algn="ctr"/>
+            <a:r>
+              <a:rPr lang="ja-JP" sz="1800" b="0" dirty="0">
+                <a:solidFill>
+                  <a:srgbClr val="FFFFFF"/>
+                </a:solidFill>
+                <a:latin typeface="Noto Sans CJK JP"/>
+                <a:cs typeface="Noto Sans CJK JP"/>
+              </a:rPr>
+              <a:t>APPENDIX</a:t>
+            </a:r>
+          </a:p>
+        </p:txBody>
+      </p:sp>
+      <p:sp>
+        <p:nvSpPr>
+          <p:cNvPr id="23" name="right_bg"/>
+          <p:cNvSpPr/>
+          <p:nvPr/>
+        </p:nvSpPr>
+        <p:spPr>
+          <a:xfrm>
+            <a:off x="3200000" y="0"/>
+            <a:ext cx="8991760" cy="6858000"/>
           </a:xfrm>
           <a:custGeom>
             <a:avLst/>
@@ -1403,7 +2181,7 @@
             </a:pathLst>
           </a:custGeom>
           <a:solidFill>
-            <a:srgbClr val="FFFFFF"/>
+            <a:srgbClr val="EFF6FF"/>
           </a:solidFill>
           <a:ln w="0">
             <a:noFill/>
@@ -1422,35 +2200,25 @@
           <a:fontRef idx="minor"/>
         </p:style>
         <p:txBody>
-          <a:bodyPr lIns="0" tIns="45720" rIns="114300" bIns="45720" anchor="ctr">
+          <a:bodyPr lIns="114300" tIns="45720" rIns="114300" bIns="45720" anchor="ctr">
             <a:noAutofit/>
           </a:bodyPr>
           <a:lstStyle/>
           <a:p>
-            <a:pPr algn="l"/>
-            <a:r>
-              <a:rPr lang="ja-JP" sz="2700" b="0" dirty="0">
-                <a:solidFill>
-                  <a:srgbClr val="1E293B"/>
-                </a:solidFill>
-                <a:latin typeface="Arial"/>
-                <a:cs typeface="Noto Sans CJK JP"/>
-              </a:rPr>
-              <a:t>別紙3　令和7年度決算により決着した事項と、引き続き確認が必要な事項</a:t>
-            </a:r>
-          </a:p>
-        </p:txBody>
-      </p:sp>
-      <p:sp>
-        <p:nvSpPr>
-          <p:cNvPr id="17" name="ch0"/>
-          <p:cNvSpPr/>
-          <p:nvPr/>
-        </p:nvSpPr>
-        <p:spPr>
-          <a:xfrm>
-            <a:off x="571680" y="1620000"/>
-            <a:ext cx="5500000" cy="340000"/>
+            <a:endParaRPr/>
+          </a:p>
+        </p:txBody>
+      </p:sp>
+      <p:sp>
+        <p:nvSpPr>
+          <p:cNvPr id="24" name="sub_lbl"/>
+          <p:cNvSpPr/>
+          <p:nvPr/>
+        </p:nvSpPr>
+        <p:spPr>
+          <a:xfrm>
+            <a:off x="3600000" y="1200000"/>
+            <a:ext cx="3000000" cy="380000"/>
           </a:xfrm>
           <a:custGeom>
             <a:avLst/>
@@ -1477,7 +2245,7 @@
             </a:pathLst>
           </a:custGeom>
           <a:solidFill>
-            <a:srgbClr val="1D4ED8"/>
+            <a:srgbClr val="EFF6FF"/>
           </a:solidFill>
           <a:ln w="0">
             <a:noFill/>
@@ -1496,35 +2264,35 @@
           <a:fontRef idx="minor"/>
         </p:style>
         <p:txBody>
-          <a:bodyPr lIns="114300" tIns="45720" rIns="114300" bIns="45720" anchor="ctr">
+          <a:bodyPr lIns="0" tIns="45720" rIns="114300" bIns="45720" anchor="ctr">
             <a:noAutofit/>
           </a:bodyPr>
           <a:lstStyle/>
           <a:p>
-            <a:pPr algn="ctr"/>
-            <a:r>
-              <a:rPr lang="ja-JP" sz="1500" b="0" dirty="0">
-                <a:solidFill>
-                  <a:srgbClr val="FFFFFF"/>
+            <a:pPr algn="l"/>
+            <a:r>
+              <a:rPr lang="ja-JP" sz="1600" b="0" dirty="0">
+                <a:solidFill>
+                  <a:srgbClr val="1E3A8A"/>
                 </a:solidFill>
                 <a:latin typeface="Noto Sans CJK JP"/>
                 <a:cs typeface="Noto Sans CJK JP"/>
               </a:rPr>
-              <a:t>決算により決着した事項</a:t>
-            </a:r>
-          </a:p>
-        </p:txBody>
-      </p:sp>
-      <p:sp>
-        <p:nvSpPr>
-          <p:cNvPr id="18" name="cs0"/>
-          <p:cNvSpPr/>
-          <p:nvPr/>
-        </p:nvSpPr>
-        <p:spPr>
-          <a:xfrm>
-            <a:off x="571680" y="2000000"/>
-            <a:ext cx="5500000" cy="240000"/>
+              <a:t>六戸町 下水道事業</a:t>
+            </a:r>
+          </a:p>
+        </p:txBody>
+      </p:sp>
+      <p:sp>
+        <p:nvSpPr>
+          <p:cNvPr id="25" name="main_ttl"/>
+          <p:cNvSpPr/>
+          <p:nvPr/>
+        </p:nvSpPr>
+        <p:spPr>
+          <a:xfrm>
+            <a:off x="3600000" y="1640000"/>
+            <a:ext cx="8400000" cy="1200000"/>
           </a:xfrm>
           <a:custGeom>
             <a:avLst/>
@@ -1553,10 +2321,8 @@
           <a:solidFill>
             <a:srgbClr val="EFF6FF"/>
           </a:solidFill>
-          <a:ln w="9525">
-            <a:solidFill>
-              <a:srgbClr val="E2E8F0"/>
-            </a:solidFill>
+          <a:ln w="0">
+            <a:noFill/>
           </a:ln>
         </p:spPr>
         <p:style>
@@ -1572,35 +2338,35 @@
           <a:fontRef idx="minor"/>
         </p:style>
         <p:txBody>
-          <a:bodyPr lIns="91440" tIns="45720" rIns="114300" bIns="45720" anchor="ctr">
+          <a:bodyPr lIns="0" tIns="0" rIns="114300" bIns="0" anchor="ctr">
             <a:noAutofit/>
           </a:bodyPr>
           <a:lstStyle/>
           <a:p>
-            <a:pPr algn="ctr"/>
-            <a:r>
-              <a:rPr lang="ja-JP" sz="1000" b="0" dirty="0">
-                <a:solidFill>
-                  <a:srgbClr val="1D4ED8"/>
-                </a:solidFill>
-                <a:latin typeface="Noto Sans CJK JP"/>
-                <a:cs typeface="Noto Sans CJK JP"/>
-              </a:rPr>
-              <a:t>本編の確認事項　A（維持管理費）・F（年間乗数）・M・N（基準値）</a:t>
-            </a:r>
-          </a:p>
-        </p:txBody>
-      </p:sp>
-      <p:sp>
-        <p:nvSpPr>
-          <p:cNvPr id="19" name="ph0"/>
-          <p:cNvSpPr/>
-          <p:nvPr/>
-        </p:nvSpPr>
-        <p:spPr>
-          <a:xfrm>
-            <a:off x="571680" y="2290000"/>
-            <a:ext cx="5500000" cy="270000"/>
+            <a:pPr algn="l"/>
+            <a:r>
+              <a:rPr lang="ja-JP" sz="4800" b="0" dirty="0">
+                <a:solidFill>
+                  <a:srgbClr val="1E293B"/>
+                </a:solidFill>
+                <a:latin typeface="Arial"/>
+                <a:cs typeface="Noto Sans CJK JP"/>
+              </a:rPr>
+              <a:t>令和7年度決算との突合</a:t>
+            </a:r>
+          </a:p>
+        </p:txBody>
+      </p:sp>
+      <p:sp>
+        <p:nvSpPr>
+          <p:cNvPr id="26" name="acc_line"/>
+          <p:cNvSpPr/>
+          <p:nvPr/>
+        </p:nvSpPr>
+        <p:spPr>
+          <a:xfrm>
+            <a:off x="3600000" y="2880000"/>
+            <a:ext cx="600000" cy="38520"/>
           </a:xfrm>
           <a:custGeom>
             <a:avLst/>
@@ -1627,7 +2393,7 @@
             </a:pathLst>
           </a:custGeom>
           <a:solidFill>
-            <a:srgbClr val="166534"/>
+            <a:srgbClr val="3B82F6"/>
           </a:solidFill>
           <a:ln w="0">
             <a:noFill/>
@@ -1646,35 +2412,25 @@
           <a:fontRef idx="minor"/>
         </p:style>
         <p:txBody>
-          <a:bodyPr lIns="91440" tIns="45720" rIns="114300" bIns="45720" anchor="ctr">
+          <a:bodyPr lIns="114300" tIns="45720" rIns="114300" bIns="45720" anchor="ctr">
             <a:noAutofit/>
           </a:bodyPr>
           <a:lstStyle/>
           <a:p>
-            <a:pPr algn="l"/>
-            <a:r>
-              <a:rPr lang="ja-JP" sz="1100" b="0" dirty="0">
-                <a:solidFill>
-                  <a:srgbClr val="FFFFFF"/>
-                </a:solidFill>
-                <a:latin typeface="Noto Sans CJK JP"/>
-                <a:cs typeface="Noto Sans CJK JP"/>
-              </a:rPr>
-              <a:t>✔ 決着した内容</a:t>
-            </a:r>
-          </a:p>
-        </p:txBody>
-      </p:sp>
-      <p:sp>
-        <p:nvSpPr>
-          <p:cNvPr id="20" name="p00"/>
-          <p:cNvSpPr/>
-          <p:nvPr/>
-        </p:nvSpPr>
-        <p:spPr>
-          <a:xfrm>
-            <a:off x="571680" y="2600000"/>
-            <a:ext cx="5500000" cy="340000"/>
+            <a:endParaRPr/>
+          </a:p>
+        </p:txBody>
+      </p:sp>
+      <p:sp>
+        <p:nvSpPr>
+          <p:cNvPr id="27" name="desc"/>
+          <p:cNvSpPr/>
+          <p:nvPr/>
+        </p:nvSpPr>
+        <p:spPr>
+          <a:xfrm>
+            <a:off x="3600000" y="3080000"/>
+            <a:ext cx="8200000" cy="3000502"/>
           </a:xfrm>
           <a:custGeom>
             <a:avLst/>
@@ -1701,12 +2457,10 @@
             </a:pathLst>
           </a:custGeom>
           <a:solidFill>
-            <a:srgbClr val="F0FDF4"/>
-          </a:solidFill>
-          <a:ln w="9525">
-            <a:solidFill>
-              <a:srgbClr val="E2E8F0"/>
-            </a:solidFill>
+            <a:srgbClr val="EFF6FF"/>
+          </a:solidFill>
+          <a:ln w="0">
+            <a:noFill/>
           </a:ln>
         </p:spPr>
         <p:style>
@@ -1722,35 +2476,61 @@
           <a:fontRef idx="minor"/>
         </p:style>
         <p:txBody>
-          <a:bodyPr lIns="91440" tIns="45720" rIns="114300" bIns="45720" anchor="ctr">
+          <a:bodyPr lIns="0" tIns="0" rIns="114300" bIns="45720" anchor="ctr">
             <a:noAutofit/>
           </a:bodyPr>
           <a:lstStyle/>
           <a:p>
             <a:pPr algn="l"/>
             <a:r>
-              <a:rPr lang="ja-JP" sz="1100" b="0" dirty="0">
-                <a:solidFill>
-                  <a:srgbClr val="166534"/>
+              <a:rPr lang="ja-JP" sz="2200" b="0" dirty="0">
+                <a:solidFill>
+                  <a:srgbClr val="475569"/>
                 </a:solidFill>
                 <a:latin typeface="Noto Sans CJK JP"/>
                 <a:cs typeface="Noto Sans CJK JP"/>
               </a:rPr>
-              <a:t>  • A 維持管理費の増加はR6→R7で＋4.7%（推計は＋40.9%）</a:t>
-            </a:r>
-          </a:p>
-        </p:txBody>
-      </p:sp>
-      <p:sp>
-        <p:nvSpPr>
-          <p:cNvPr id="21" name="p01"/>
-          <p:cNvSpPr/>
-          <p:nvPr/>
-        </p:nvSpPr>
-        <p:spPr>
-          <a:xfrm>
-            <a:off x="571680" y="2960000"/>
-            <a:ext cx="5500000" cy="340000"/>
+              <a:t>本別紙は、令和7年度決算（合計残高試算表・貸借対照表／令和8年3月31日）と、本編の収支シミュレーションが前提としている経営戦略の推計値を突合したものです。</a:t>
+            </a:r>
+          </a:p>
+          <a:p>
+            <a:pPr algn="l"/>
+            <a:r>
+              <a:rPr lang="ja-JP" sz="2200" b="0" dirty="0">
+                <a:solidFill>
+                  <a:srgbClr val="475569"/>
+                </a:solidFill>
+                <a:latin typeface="Noto Sans CJK JP"/>
+                <a:cs typeface="Noto Sans CJK JP"/>
+              </a:rPr>
+              <a:t>本編（37ページ）の数値は経営戦略の推計値のままとしています。決算実績を起点に組み直した場合の指標は、別紙2に試算として示しています。</a:t>
+            </a:r>
+          </a:p>
+          <a:p>
+            <a:pPr algn="l"/>
+            <a:r>
+              <a:rPr lang="ja-JP" sz="2200" b="0" dirty="0">
+                <a:solidFill>
+                  <a:srgbClr val="475569"/>
+                </a:solidFill>
+                <a:latin typeface="Noto Sans CJK JP"/>
+                <a:cs typeface="Noto Sans CJK JP"/>
+              </a:rPr>
+              <a:t>第2回 六戸町下水道使用料審議委員会　令和8年8月19日</a:t>
+            </a:r>
+          </a:p>
+        </p:txBody>
+      </p:sp>
+      <p:sp>
+        <p:nvSpPr>
+          <p:cNvPr id="28" name="pgnum"/>
+          <p:cNvSpPr/>
+          <p:nvPr/>
+        </p:nvSpPr>
+        <p:spPr>
+          <a:xfrm>
+            <a:off x="11200000" y="6570000"/>
+            <a:ext cx="777240" cy="172800"/>
           </a:xfrm>
           <a:custGeom>
             <a:avLst/>
@@ -1777,1198 +2557,34 @@
             </a:pathLst>
           </a:custGeom>
           <a:solidFill>
-            <a:srgbClr val="F0FDF4"/>
-          </a:solidFill>
-          <a:ln w="9525">
-            <a:solidFill>
-              <a:srgbClr val="E2E8F0"/>
-            </a:solidFill>
-          </a:ln>
-        </p:spPr>
-        <p:style>
-          <a:lnRef idx="0">
-            <a:scrgbClr r="0" g="0" b="0"/>
-          </a:lnRef>
-          <a:fillRef idx="0">
-            <a:scrgbClr r="0" g="0" b="0"/>
-          </a:fillRef>
-          <a:effectRef idx="0">
-            <a:scrgbClr r="0" g="0" b="0"/>
-          </a:effectRef>
-          <a:fontRef idx="minor"/>
-        </p:style>
-        <p:txBody>
-          <a:bodyPr lIns="91440" tIns="45720" rIns="114300" bIns="45720" anchor="ctr">
-            <a:noAutofit/>
-          </a:bodyPr>
-          <a:lstStyle/>
-          <a:p>
-            <a:pPr algn="l"/>
-            <a:r>
-              <a:rPr lang="ja-JP" sz="1100" b="0" dirty="0">
-                <a:solidFill>
-                  <a:srgbClr val="166534"/>
-                </a:solidFill>
-                <a:latin typeface="Noto Sans CJK JP"/>
-                <a:cs typeface="Noto Sans CJK JP"/>
-              </a:rPr>
-              <a:t>  • F 農集の基本使用料の年間乗数は×6（隔月請求）が正しい</a:t>
-            </a:r>
-          </a:p>
-        </p:txBody>
-      </p:sp>
-      <p:sp>
-        <p:nvSpPr>
-          <p:cNvPr id="22" name="p02"/>
-          <p:cNvSpPr/>
-          <p:nvPr/>
-        </p:nvSpPr>
-        <p:spPr>
-          <a:xfrm>
-            <a:off x="571680" y="3320000"/>
-            <a:ext cx="5500000" cy="340000"/>
-          </a:xfrm>
-          <a:custGeom>
-            <a:avLst/>
-            <a:gdLst/>
-            <a:ahLst/>
-            <a:cxnLst/>
-            <a:rect l="l" t="t" r="r" b="b"/>
-            <a:pathLst>
-              <a:path w="21600" h="21600">
-                <a:moveTo>
-                  <a:pt x="0" y="0"/>
-                </a:moveTo>
-                <a:lnTo>
-                  <a:pt x="21600" y="0"/>
-                </a:lnTo>
-                <a:lnTo>
-                  <a:pt x="21600" y="21600"/>
-                </a:lnTo>
-                <a:lnTo>
-                  <a:pt x="0" y="21600"/>
-                </a:lnTo>
-                <a:close/>
-              </a:path>
-            </a:pathLst>
-          </a:custGeom>
-          <a:solidFill>
-            <a:srgbClr val="F0FDF4"/>
-          </a:solidFill>
-          <a:ln w="9525">
-            <a:solidFill>
-              <a:srgbClr val="E2E8F0"/>
-            </a:solidFill>
-          </a:ln>
-        </p:spPr>
-        <p:style>
-          <a:lnRef idx="0">
-            <a:scrgbClr r="0" g="0" b="0"/>
-          </a:lnRef>
-          <a:fillRef idx="0">
-            <a:scrgbClr r="0" g="0" b="0"/>
-          </a:fillRef>
-          <a:effectRef idx="0">
-            <a:scrgbClr r="0" g="0" b="0"/>
-          </a:effectRef>
-          <a:fontRef idx="minor"/>
-        </p:style>
-        <p:txBody>
-          <a:bodyPr lIns="91440" tIns="45720" rIns="114300" bIns="45720" anchor="ctr">
-            <a:noAutofit/>
-          </a:bodyPr>
-          <a:lstStyle/>
-          <a:p>
-            <a:pPr algn="l"/>
-            <a:r>
-              <a:rPr lang="ja-JP" sz="1100" b="0" dirty="0">
-                <a:solidFill>
-                  <a:srgbClr val="166534"/>
-                </a:solidFill>
-                <a:latin typeface="Noto Sans CJK JP"/>
-                <a:cs typeface="Noto Sans CJK JP"/>
-              </a:rPr>
-              <a:t>  • M・N R7実績を起点にすればR6実績補正が不要となり解消</a:t>
-            </a:r>
-          </a:p>
-        </p:txBody>
-      </p:sp>
-      <p:sp>
-        <p:nvSpPr>
-          <p:cNvPr id="23" name="mh0"/>
-          <p:cNvSpPr/>
-          <p:nvPr/>
-        </p:nvSpPr>
-        <p:spPr>
-          <a:xfrm>
-            <a:off x="571680" y="3700000"/>
-            <a:ext cx="5500000" cy="270000"/>
-          </a:xfrm>
-          <a:custGeom>
-            <a:avLst/>
-            <a:gdLst/>
-            <a:ahLst/>
-            <a:cxnLst/>
-            <a:rect l="l" t="t" r="r" b="b"/>
-            <a:pathLst>
-              <a:path w="21600" h="21600">
-                <a:moveTo>
-                  <a:pt x="0" y="0"/>
-                </a:moveTo>
-                <a:lnTo>
-                  <a:pt x="21600" y="0"/>
-                </a:lnTo>
-                <a:lnTo>
-                  <a:pt x="21600" y="21600"/>
-                </a:lnTo>
-                <a:lnTo>
-                  <a:pt x="0" y="21600"/>
-                </a:lnTo>
-                <a:close/>
-              </a:path>
-            </a:pathLst>
-          </a:custGeom>
-          <a:solidFill>
-            <a:srgbClr val="EF4444"/>
+            <a:srgbClr val="1E3A8A"/>
           </a:solidFill>
           <a:ln w="0">
             <a:noFill/>
           </a:ln>
         </p:spPr>
         <p:style>
-          <a:lnRef idx="0">
-            <a:scrgbClr r="0" g="0" b="0"/>
-          </a:lnRef>
-          <a:fillRef idx="0">
-            <a:scrgbClr r="0" g="0" b="0"/>
-          </a:fillRef>
-          <a:effectRef idx="0">
-            <a:scrgbClr r="0" g="0" b="0"/>
-          </a:effectRef>
-          <a:fontRef idx="minor"/>
-        </p:style>
-        <p:txBody>
-          <a:bodyPr lIns="91440" tIns="45720" rIns="114300" bIns="45720" anchor="ctr">
+          <a:lnRef idx="0"/>
+          <a:fillRef idx="0"/>
+          <a:effectRef idx="0"/>
+          <a:fontRef idx="minor"/>
+        </p:style>
+        <p:txBody>
+          <a:bodyPr lIns="0" tIns="0" rIns="0" bIns="0" anchor="ctr">
             <a:noAutofit/>
           </a:bodyPr>
           <a:lstStyle/>
           <a:p>
-            <a:pPr algn="l"/>
-            <a:r>
-              <a:rPr lang="ja-JP" sz="1100" b="0" dirty="0">
+            <a:pPr algn="ctr"/>
+            <a:r>
+              <a:rPr lang="ja-JP" sz="900" b="1" dirty="0">
                 <a:solidFill>
                   <a:srgbClr val="FFFFFF"/>
                 </a:solidFill>
-                <a:latin typeface="Noto Sans CJK JP"/>
-                <a:cs typeface="Noto Sans CJK JP"/>
-              </a:rPr>
-              <a:t>✖ 決算からは判別できない点</a:t>
-            </a:r>
-          </a:p>
-        </p:txBody>
-      </p:sp>
-      <p:sp>
-        <p:nvSpPr>
-          <p:cNvPr id="24" name="m00"/>
-          <p:cNvSpPr/>
-          <p:nvPr/>
-        </p:nvSpPr>
-        <p:spPr>
-          <a:xfrm>
-            <a:off x="571680" y="4010000"/>
-            <a:ext cx="5500000" cy="340000"/>
-          </a:xfrm>
-          <a:custGeom>
-            <a:avLst/>
-            <a:gdLst/>
-            <a:ahLst/>
-            <a:cxnLst/>
-            <a:rect l="l" t="t" r="r" b="b"/>
-            <a:pathLst>
-              <a:path w="21600" h="21600">
-                <a:moveTo>
-                  <a:pt x="0" y="0"/>
-                </a:moveTo>
-                <a:lnTo>
-                  <a:pt x="21600" y="0"/>
-                </a:lnTo>
-                <a:lnTo>
-                  <a:pt x="21600" y="21600"/>
-                </a:lnTo>
-                <a:lnTo>
-                  <a:pt x="0" y="21600"/>
-                </a:lnTo>
-                <a:close/>
-              </a:path>
-            </a:pathLst>
-          </a:custGeom>
-          <a:solidFill>
-            <a:srgbClr val="FEF2F2"/>
-          </a:solidFill>
-          <a:ln w="9525">
-            <a:solidFill>
-              <a:srgbClr val="E2E8F0"/>
-            </a:solidFill>
-          </a:ln>
-        </p:spPr>
-        <p:style>
-          <a:lnRef idx="0">
-            <a:scrgbClr r="0" g="0" b="0"/>
-          </a:lnRef>
-          <a:fillRef idx="0">
-            <a:scrgbClr r="0" g="0" b="0"/>
-          </a:fillRef>
-          <a:effectRef idx="0">
-            <a:scrgbClr r="0" g="0" b="0"/>
-          </a:effectRef>
-          <a:fontRef idx="minor"/>
-        </p:style>
-        <p:txBody>
-          <a:bodyPr lIns="91440" tIns="45720" rIns="114300" bIns="45720" anchor="ctr">
-            <a:noAutofit/>
-          </a:bodyPr>
-          <a:lstStyle/>
-          <a:p>
-            <a:pPr algn="l"/>
-            <a:r>
-              <a:rPr lang="ja-JP" sz="1100" b="0" dirty="0">
-                <a:solidFill>
-                  <a:srgbClr val="EF4444"/>
-                </a:solidFill>
-                <a:latin typeface="Noto Sans CJK JP"/>
-                <a:cs typeface="Noto Sans CJK JP"/>
-              </a:rPr>
-              <a:t>  • 汚水処理費が推計を43,186千円下回った理由（繰延べか推計過大か）</a:t>
-            </a:r>
-          </a:p>
-        </p:txBody>
-      </p:sp>
-      <p:sp>
-        <p:nvSpPr>
-          <p:cNvPr id="25" name="m01"/>
-          <p:cNvSpPr/>
-          <p:nvPr/>
-        </p:nvSpPr>
-        <p:spPr>
-          <a:xfrm>
-            <a:off x="571680" y="4370000"/>
-            <a:ext cx="5500000" cy="340000"/>
-          </a:xfrm>
-          <a:custGeom>
-            <a:avLst/>
-            <a:gdLst/>
-            <a:ahLst/>
-            <a:cxnLst/>
-            <a:rect l="l" t="t" r="r" b="b"/>
-            <a:pathLst>
-              <a:path w="21600" h="21600">
-                <a:moveTo>
-                  <a:pt x="0" y="0"/>
-                </a:moveTo>
-                <a:lnTo>
-                  <a:pt x="21600" y="0"/>
-                </a:lnTo>
-                <a:lnTo>
-                  <a:pt x="21600" y="21600"/>
-                </a:lnTo>
-                <a:lnTo>
-                  <a:pt x="0" y="21600"/>
-                </a:lnTo>
-                <a:close/>
-              </a:path>
-            </a:pathLst>
-          </a:custGeom>
-          <a:solidFill>
-            <a:srgbClr val="FEF2F2"/>
-          </a:solidFill>
-          <a:ln w="9525">
-            <a:solidFill>
-              <a:srgbClr val="E2E8F0"/>
-            </a:solidFill>
-          </a:ln>
-        </p:spPr>
-        <p:style>
-          <a:lnRef idx="0">
-            <a:scrgbClr r="0" g="0" b="0"/>
-          </a:lnRef>
-          <a:fillRef idx="0">
-            <a:scrgbClr r="0" g="0" b="0"/>
-          </a:fillRef>
-          <a:effectRef idx="0">
-            <a:scrgbClr r="0" g="0" b="0"/>
-          </a:effectRef>
-          <a:fontRef idx="minor"/>
-        </p:style>
-        <p:txBody>
-          <a:bodyPr lIns="91440" tIns="45720" rIns="114300" bIns="45720" anchor="ctr">
-            <a:noAutofit/>
-          </a:bodyPr>
-          <a:lstStyle/>
-          <a:p>
-            <a:pPr algn="l"/>
-            <a:r>
-              <a:rPr lang="ja-JP" sz="1100" b="0" dirty="0">
-                <a:solidFill>
-                  <a:srgbClr val="EF4444"/>
-                </a:solidFill>
-                <a:latin typeface="Noto Sans CJK JP"/>
-                <a:cs typeface="Noto Sans CJK JP"/>
-              </a:rPr>
-              <a:t>  • 令和8年度以降の維持管理費の見込み（流域下水道負担金63,707千円等）</a:t>
-            </a:r>
-          </a:p>
-        </p:txBody>
-      </p:sp>
-      <p:sp>
-        <p:nvSpPr>
-          <p:cNvPr id="26" name="ch1"/>
-          <p:cNvSpPr/>
-          <p:nvPr/>
-        </p:nvSpPr>
-        <p:spPr>
-          <a:xfrm>
-            <a:off x="6271680" y="1620000"/>
-            <a:ext cx="5500000" cy="340000"/>
-          </a:xfrm>
-          <a:custGeom>
-            <a:avLst/>
-            <a:gdLst/>
-            <a:ahLst/>
-            <a:cxnLst/>
-            <a:rect l="l" t="t" r="r" b="b"/>
-            <a:pathLst>
-              <a:path w="21600" h="21600">
-                <a:moveTo>
-                  <a:pt x="0" y="0"/>
-                </a:moveTo>
-                <a:lnTo>
-                  <a:pt x="21600" y="0"/>
-                </a:lnTo>
-                <a:lnTo>
-                  <a:pt x="21600" y="21600"/>
-                </a:lnTo>
-                <a:lnTo>
-                  <a:pt x="0" y="21600"/>
-                </a:lnTo>
-                <a:close/>
-              </a:path>
-            </a:pathLst>
-          </a:custGeom>
-          <a:solidFill>
-            <a:srgbClr val="EA580C"/>
-          </a:solidFill>
-          <a:ln w="0">
-            <a:noFill/>
-          </a:ln>
-        </p:spPr>
-        <p:style>
-          <a:lnRef idx="0">
-            <a:scrgbClr r="0" g="0" b="0"/>
-          </a:lnRef>
-          <a:fillRef idx="0">
-            <a:scrgbClr r="0" g="0" b="0"/>
-          </a:fillRef>
-          <a:effectRef idx="0">
-            <a:scrgbClr r="0" g="0" b="0"/>
-          </a:effectRef>
-          <a:fontRef idx="minor"/>
-        </p:style>
-        <p:txBody>
-          <a:bodyPr lIns="114300" tIns="45720" rIns="114300" bIns="45720" anchor="ctr">
-            <a:noAutofit/>
-          </a:bodyPr>
-          <a:lstStyle/>
-          <a:p>
-            <a:pPr algn="ctr"/>
-            <a:r>
-              <a:rPr lang="ja-JP" sz="1500" b="0" dirty="0">
-                <a:solidFill>
-                  <a:srgbClr val="FFFFFF"/>
-                </a:solidFill>
-                <a:latin typeface="Noto Sans CJK JP"/>
-                <a:cs typeface="Noto Sans CJK JP"/>
-              </a:rPr>
-              <a:t>引き続き確認が必要な事項</a:t>
-            </a:r>
-          </a:p>
-        </p:txBody>
-      </p:sp>
-      <p:sp>
-        <p:nvSpPr>
-          <p:cNvPr id="27" name="cs1"/>
-          <p:cNvSpPr/>
-          <p:nvPr/>
-        </p:nvSpPr>
-        <p:spPr>
-          <a:xfrm>
-            <a:off x="6271680" y="2000000"/>
-            <a:ext cx="5500000" cy="240000"/>
-          </a:xfrm>
-          <a:custGeom>
-            <a:avLst/>
-            <a:gdLst/>
-            <a:ahLst/>
-            <a:cxnLst/>
-            <a:rect l="l" t="t" r="r" b="b"/>
-            <a:pathLst>
-              <a:path w="21600" h="21600">
-                <a:moveTo>
-                  <a:pt x="0" y="0"/>
-                </a:moveTo>
-                <a:lnTo>
-                  <a:pt x="21600" y="0"/>
-                </a:lnTo>
-                <a:lnTo>
-                  <a:pt x="21600" y="21600"/>
-                </a:lnTo>
-                <a:lnTo>
-                  <a:pt x="0" y="21600"/>
-                </a:lnTo>
-                <a:close/>
-              </a:path>
-            </a:pathLst>
-          </a:custGeom>
-          <a:solidFill>
-            <a:srgbClr val="EFF6FF"/>
-          </a:solidFill>
-          <a:ln w="9525">
-            <a:solidFill>
-              <a:srgbClr val="E2E8F0"/>
-            </a:solidFill>
-          </a:ln>
-        </p:spPr>
-        <p:style>
-          <a:lnRef idx="0">
-            <a:scrgbClr r="0" g="0" b="0"/>
-          </a:lnRef>
-          <a:fillRef idx="0">
-            <a:scrgbClr r="0" g="0" b="0"/>
-          </a:fillRef>
-          <a:effectRef idx="0">
-            <a:scrgbClr r="0" g="0" b="0"/>
-          </a:effectRef>
-          <a:fontRef idx="minor"/>
-        </p:style>
-        <p:txBody>
-          <a:bodyPr lIns="91440" tIns="45720" rIns="114300" bIns="45720" anchor="ctr">
-            <a:noAutofit/>
-          </a:bodyPr>
-          <a:lstStyle/>
-          <a:p>
-            <a:pPr algn="ctr"/>
-            <a:r>
-              <a:rPr lang="ja-JP" sz="1000" b="0" dirty="0">
-                <a:solidFill>
-                  <a:srgbClr val="EA580C"/>
-                </a:solidFill>
-                <a:latin typeface="Noto Sans CJK JP"/>
-                <a:cs typeface="Noto Sans CJK JP"/>
-              </a:rPr>
-              <a:t>本編の確認事項　O（交付金）・P（三沢市）・Q（財政指標）・R（経営改善）</a:t>
-            </a:r>
-          </a:p>
-        </p:txBody>
-      </p:sp>
-      <p:sp>
-        <p:nvSpPr>
-          <p:cNvPr id="28" name="ph1"/>
-          <p:cNvSpPr/>
-          <p:nvPr/>
-        </p:nvSpPr>
-        <p:spPr>
-          <a:xfrm>
-            <a:off x="6271680" y="2290000"/>
-            <a:ext cx="5500000" cy="270000"/>
-          </a:xfrm>
-          <a:custGeom>
-            <a:avLst/>
-            <a:gdLst/>
-            <a:ahLst/>
-            <a:cxnLst/>
-            <a:rect l="l" t="t" r="r" b="b"/>
-            <a:pathLst>
-              <a:path w="21600" h="21600">
-                <a:moveTo>
-                  <a:pt x="0" y="0"/>
-                </a:moveTo>
-                <a:lnTo>
-                  <a:pt x="21600" y="0"/>
-                </a:lnTo>
-                <a:lnTo>
-                  <a:pt x="21600" y="21600"/>
-                </a:lnTo>
-                <a:lnTo>
-                  <a:pt x="0" y="21600"/>
-                </a:lnTo>
-                <a:close/>
-              </a:path>
-            </a:pathLst>
-          </a:custGeom>
-          <a:solidFill>
-            <a:srgbClr val="166534"/>
-          </a:solidFill>
-          <a:ln w="0">
-            <a:noFill/>
-          </a:ln>
-        </p:spPr>
-        <p:style>
-          <a:lnRef idx="0">
-            <a:scrgbClr r="0" g="0" b="0"/>
-          </a:lnRef>
-          <a:fillRef idx="0">
-            <a:scrgbClr r="0" g="0" b="0"/>
-          </a:fillRef>
-          <a:effectRef idx="0">
-            <a:scrgbClr r="0" g="0" b="0"/>
-          </a:effectRef>
-          <a:fontRef idx="minor"/>
-        </p:style>
-        <p:txBody>
-          <a:bodyPr lIns="91440" tIns="45720" rIns="114300" bIns="45720" anchor="ctr">
-            <a:noAutofit/>
-          </a:bodyPr>
-          <a:lstStyle/>
-          <a:p>
-            <a:pPr algn="l"/>
-            <a:r>
-              <a:rPr lang="ja-JP" sz="1100" b="0" dirty="0">
-                <a:solidFill>
-                  <a:srgbClr val="FFFFFF"/>
-                </a:solidFill>
-                <a:latin typeface="Noto Sans CJK JP"/>
-                <a:cs typeface="Noto Sans CJK JP"/>
-              </a:rPr>
-              <a:t>✔ 決算資料から判明した事項（確認事項Q・一部解決）</a:t>
-            </a:r>
-          </a:p>
-        </p:txBody>
-      </p:sp>
-      <p:sp>
-        <p:nvSpPr>
-          <p:cNvPr id="29" name="p10"/>
-          <p:cNvSpPr/>
-          <p:nvPr/>
-        </p:nvSpPr>
-        <p:spPr>
-          <a:xfrm>
-            <a:off x="6271680" y="2600000"/>
-            <a:ext cx="5500000" cy="340000"/>
-          </a:xfrm>
-          <a:custGeom>
-            <a:avLst/>
-            <a:gdLst/>
-            <a:ahLst/>
-            <a:cxnLst/>
-            <a:rect l="l" t="t" r="r" b="b"/>
-            <a:pathLst>
-              <a:path w="21600" h="21600">
-                <a:moveTo>
-                  <a:pt x="0" y="0"/>
-                </a:moveTo>
-                <a:lnTo>
-                  <a:pt x="21600" y="0"/>
-                </a:lnTo>
-                <a:lnTo>
-                  <a:pt x="21600" y="21600"/>
-                </a:lnTo>
-                <a:lnTo>
-                  <a:pt x="0" y="21600"/>
-                </a:lnTo>
-                <a:close/>
-              </a:path>
-            </a:pathLst>
-          </a:custGeom>
-          <a:solidFill>
-            <a:srgbClr val="F0FDF4"/>
-          </a:solidFill>
-          <a:ln w="9525">
-            <a:solidFill>
-              <a:srgbClr val="E2E8F0"/>
-            </a:solidFill>
-          </a:ln>
-        </p:spPr>
-        <p:style>
-          <a:lnRef idx="0">
-            <a:scrgbClr r="0" g="0" b="0"/>
-          </a:lnRef>
-          <a:fillRef idx="0">
-            <a:scrgbClr r="0" g="0" b="0"/>
-          </a:fillRef>
-          <a:effectRef idx="0">
-            <a:scrgbClr r="0" g="0" b="0"/>
-          </a:effectRef>
-          <a:fontRef idx="minor"/>
-        </p:style>
-        <p:txBody>
-          <a:bodyPr lIns="91440" tIns="45720" rIns="114300" bIns="45720" anchor="ctr">
-            <a:noAutofit/>
-          </a:bodyPr>
-          <a:lstStyle/>
-          <a:p>
-            <a:pPr algn="l"/>
-            <a:r>
-              <a:rPr lang="ja-JP" sz="1100" b="0" dirty="0">
-                <a:solidFill>
-                  <a:srgbClr val="166534"/>
-                </a:solidFill>
-                <a:latin typeface="Noto Sans CJK JP"/>
-                <a:cs typeface="Noto Sans CJK JP"/>
-              </a:rPr>
-              <a:t>  • 企業債残高 公共1,548,034千円・農集206,675千円（R7年度末）</a:t>
-            </a:r>
-          </a:p>
-        </p:txBody>
-      </p:sp>
-      <p:sp>
-        <p:nvSpPr>
-          <p:cNvPr id="30" name="p11"/>
-          <p:cNvSpPr/>
-          <p:nvPr/>
-        </p:nvSpPr>
-        <p:spPr>
-          <a:xfrm>
-            <a:off x="6271680" y="2960000"/>
-            <a:ext cx="5500000" cy="340000"/>
-          </a:xfrm>
-          <a:custGeom>
-            <a:avLst/>
-            <a:gdLst/>
-            <a:ahLst/>
-            <a:cxnLst/>
-            <a:rect l="l" t="t" r="r" b="b"/>
-            <a:pathLst>
-              <a:path w="21600" h="21600">
-                <a:moveTo>
-                  <a:pt x="0" y="0"/>
-                </a:moveTo>
-                <a:lnTo>
-                  <a:pt x="21600" y="0"/>
-                </a:lnTo>
-                <a:lnTo>
-                  <a:pt x="21600" y="21600"/>
-                </a:lnTo>
-                <a:lnTo>
-                  <a:pt x="0" y="21600"/>
-                </a:lnTo>
-                <a:close/>
-              </a:path>
-            </a:pathLst>
-          </a:custGeom>
-          <a:solidFill>
-            <a:srgbClr val="F0FDF4"/>
-          </a:solidFill>
-          <a:ln w="9525">
-            <a:solidFill>
-              <a:srgbClr val="E2E8F0"/>
-            </a:solidFill>
-          </a:ln>
-        </p:spPr>
-        <p:style>
-          <a:lnRef idx="0">
-            <a:scrgbClr r="0" g="0" b="0"/>
-          </a:lnRef>
-          <a:fillRef idx="0">
-            <a:scrgbClr r="0" g="0" b="0"/>
-          </a:fillRef>
-          <a:effectRef idx="0">
-            <a:scrgbClr r="0" g="0" b="0"/>
-          </a:effectRef>
-          <a:fontRef idx="minor"/>
-        </p:style>
-        <p:txBody>
-          <a:bodyPr lIns="91440" tIns="45720" rIns="114300" bIns="45720" anchor="ctr">
-            <a:noAutofit/>
-          </a:bodyPr>
-          <a:lstStyle/>
-          <a:p>
-            <a:pPr algn="l"/>
-            <a:r>
-              <a:rPr lang="ja-JP" sz="1100" b="0" dirty="0">
-                <a:solidFill>
-                  <a:srgbClr val="166534"/>
-                </a:solidFill>
-                <a:latin typeface="Noto Sans CJK JP"/>
-                <a:cs typeface="Noto Sans CJK JP"/>
-              </a:rPr>
-              <a:t>  • 現金預金 公共156,044千円・農集28,477千円</a:t>
-            </a:r>
-          </a:p>
-        </p:txBody>
-      </p:sp>
-      <p:sp>
-        <p:nvSpPr>
-          <p:cNvPr id="31" name="p12"/>
-          <p:cNvSpPr/>
-          <p:nvPr/>
-        </p:nvSpPr>
-        <p:spPr>
-          <a:xfrm>
-            <a:off x="6271680" y="3320000"/>
-            <a:ext cx="5500000" cy="340000"/>
-          </a:xfrm>
-          <a:custGeom>
-            <a:avLst/>
-            <a:gdLst/>
-            <a:ahLst/>
-            <a:cxnLst/>
-            <a:rect l="l" t="t" r="r" b="b"/>
-            <a:pathLst>
-              <a:path w="21600" h="21600">
-                <a:moveTo>
-                  <a:pt x="0" y="0"/>
-                </a:moveTo>
-                <a:lnTo>
-                  <a:pt x="21600" y="0"/>
-                </a:lnTo>
-                <a:lnTo>
-                  <a:pt x="21600" y="21600"/>
-                </a:lnTo>
-                <a:lnTo>
-                  <a:pt x="0" y="21600"/>
-                </a:lnTo>
-                <a:close/>
-              </a:path>
-            </a:pathLst>
-          </a:custGeom>
-          <a:solidFill>
-            <a:srgbClr val="F0FDF4"/>
-          </a:solidFill>
-          <a:ln w="9525">
-            <a:solidFill>
-              <a:srgbClr val="E2E8F0"/>
-            </a:solidFill>
-          </a:ln>
-        </p:spPr>
-        <p:style>
-          <a:lnRef idx="0">
-            <a:scrgbClr r="0" g="0" b="0"/>
-          </a:lnRef>
-          <a:fillRef idx="0">
-            <a:scrgbClr r="0" g="0" b="0"/>
-          </a:fillRef>
-          <a:effectRef idx="0">
-            <a:scrgbClr r="0" g="0" b="0"/>
-          </a:effectRef>
-          <a:fontRef idx="minor"/>
-        </p:style>
-        <p:txBody>
-          <a:bodyPr lIns="91440" tIns="45720" rIns="114300" bIns="45720" anchor="ctr">
-            <a:noAutofit/>
-          </a:bodyPr>
-          <a:lstStyle/>
-          <a:p>
-            <a:pPr algn="l"/>
-            <a:r>
-              <a:rPr lang="ja-JP" sz="1100" b="0" dirty="0">
-                <a:solidFill>
-                  <a:srgbClr val="166534"/>
-                </a:solidFill>
-                <a:latin typeface="Noto Sans CJK JP"/>
-                <a:cs typeface="Noto Sans CJK JP"/>
-              </a:rPr>
-              <a:t>  • 未処分利益剰余金 公共102,454千円・農集4,783千円</a:t>
-            </a:r>
-          </a:p>
-        </p:txBody>
-      </p:sp>
-      <p:sp>
-        <p:nvSpPr>
-          <p:cNvPr id="32" name="mh1"/>
-          <p:cNvSpPr/>
-          <p:nvPr/>
-        </p:nvSpPr>
-        <p:spPr>
-          <a:xfrm>
-            <a:off x="6271680" y="3700000"/>
-            <a:ext cx="5500000" cy="270000"/>
-          </a:xfrm>
-          <a:custGeom>
-            <a:avLst/>
-            <a:gdLst/>
-            <a:ahLst/>
-            <a:cxnLst/>
-            <a:rect l="l" t="t" r="r" b="b"/>
-            <a:pathLst>
-              <a:path w="21600" h="21600">
-                <a:moveTo>
-                  <a:pt x="0" y="0"/>
-                </a:moveTo>
-                <a:lnTo>
-                  <a:pt x="21600" y="0"/>
-                </a:lnTo>
-                <a:lnTo>
-                  <a:pt x="21600" y="21600"/>
-                </a:lnTo>
-                <a:lnTo>
-                  <a:pt x="0" y="21600"/>
-                </a:lnTo>
-                <a:close/>
-              </a:path>
-            </a:pathLst>
-          </a:custGeom>
-          <a:solidFill>
-            <a:srgbClr val="EF4444"/>
-          </a:solidFill>
-          <a:ln w="0">
-            <a:noFill/>
-          </a:ln>
-        </p:spPr>
-        <p:style>
-          <a:lnRef idx="0">
-            <a:scrgbClr r="0" g="0" b="0"/>
-          </a:lnRef>
-          <a:fillRef idx="0">
-            <a:scrgbClr r="0" g="0" b="0"/>
-          </a:fillRef>
-          <a:effectRef idx="0">
-            <a:scrgbClr r="0" g="0" b="0"/>
-          </a:effectRef>
-          <a:fontRef idx="minor"/>
-        </p:style>
-        <p:txBody>
-          <a:bodyPr lIns="91440" tIns="45720" rIns="114300" bIns="45720" anchor="ctr">
-            <a:noAutofit/>
-          </a:bodyPr>
-          <a:lstStyle/>
-          <a:p>
-            <a:pPr algn="l"/>
-            <a:r>
-              <a:rPr lang="ja-JP" sz="1100" b="0" dirty="0">
-                <a:solidFill>
-                  <a:srgbClr val="FFFFFF"/>
-                </a:solidFill>
-                <a:latin typeface="Noto Sans CJK JP"/>
-                <a:cs typeface="Noto Sans CJK JP"/>
-              </a:rPr>
-              <a:t>✖ 未受領の資料</a:t>
-            </a:r>
-          </a:p>
-        </p:txBody>
-      </p:sp>
-      <p:sp>
-        <p:nvSpPr>
-          <p:cNvPr id="33" name="m10"/>
-          <p:cNvSpPr/>
-          <p:nvPr/>
-        </p:nvSpPr>
-        <p:spPr>
-          <a:xfrm>
-            <a:off x="6271680" y="4010000"/>
-            <a:ext cx="5500000" cy="340000"/>
-          </a:xfrm>
-          <a:custGeom>
-            <a:avLst/>
-            <a:gdLst/>
-            <a:ahLst/>
-            <a:cxnLst/>
-            <a:rect l="l" t="t" r="r" b="b"/>
-            <a:pathLst>
-              <a:path w="21600" h="21600">
-                <a:moveTo>
-                  <a:pt x="0" y="0"/>
-                </a:moveTo>
-                <a:lnTo>
-                  <a:pt x="21600" y="0"/>
-                </a:lnTo>
-                <a:lnTo>
-                  <a:pt x="21600" y="21600"/>
-                </a:lnTo>
-                <a:lnTo>
-                  <a:pt x="0" y="21600"/>
-                </a:lnTo>
-                <a:close/>
-              </a:path>
-            </a:pathLst>
-          </a:custGeom>
-          <a:solidFill>
-            <a:srgbClr val="FEF2F2"/>
-          </a:solidFill>
-          <a:ln w="9525">
-            <a:solidFill>
-              <a:srgbClr val="E2E8F0"/>
-            </a:solidFill>
-          </a:ln>
-        </p:spPr>
-        <p:style>
-          <a:lnRef idx="0">
-            <a:scrgbClr r="0" g="0" b="0"/>
-          </a:lnRef>
-          <a:fillRef idx="0">
-            <a:scrgbClr r="0" g="0" b="0"/>
-          </a:fillRef>
-          <a:effectRef idx="0">
-            <a:scrgbClr r="0" g="0" b="0"/>
-          </a:effectRef>
-          <a:fontRef idx="minor"/>
-        </p:style>
-        <p:txBody>
-          <a:bodyPr lIns="91440" tIns="45720" rIns="114300" bIns="45720" anchor="ctr">
-            <a:noAutofit/>
-          </a:bodyPr>
-          <a:lstStyle/>
-          <a:p>
-            <a:pPr algn="l"/>
-            <a:r>
-              <a:rPr lang="ja-JP" sz="1100" b="0" dirty="0">
-                <a:solidFill>
-                  <a:srgbClr val="EF4444"/>
-                </a:solidFill>
-                <a:latin typeface="Noto Sans CJK JP"/>
-                <a:cs typeface="Noto Sans CJK JP"/>
-              </a:rPr>
-              <a:t>  • 有収水量・調定口数の実績／企業債の元利償還見通し</a:t>
-            </a:r>
-          </a:p>
-        </p:txBody>
-      </p:sp>
-      <p:sp>
-        <p:nvSpPr>
-          <p:cNvPr id="34" name="m11"/>
-          <p:cNvSpPr/>
-          <p:nvPr/>
-        </p:nvSpPr>
-        <p:spPr>
-          <a:xfrm>
-            <a:off x="6271680" y="4370000"/>
-            <a:ext cx="5500000" cy="340000"/>
-          </a:xfrm>
-          <a:custGeom>
-            <a:avLst/>
-            <a:gdLst/>
-            <a:ahLst/>
-            <a:cxnLst/>
-            <a:rect l="l" t="t" r="r" b="b"/>
-            <a:pathLst>
-              <a:path w="21600" h="21600">
-                <a:moveTo>
-                  <a:pt x="0" y="0"/>
-                </a:moveTo>
-                <a:lnTo>
-                  <a:pt x="21600" y="0"/>
-                </a:lnTo>
-                <a:lnTo>
-                  <a:pt x="21600" y="21600"/>
-                </a:lnTo>
-                <a:lnTo>
-                  <a:pt x="0" y="21600"/>
-                </a:lnTo>
-                <a:close/>
-              </a:path>
-            </a:pathLst>
-          </a:custGeom>
-          <a:solidFill>
-            <a:srgbClr val="FEF2F2"/>
-          </a:solidFill>
-          <a:ln w="9525">
-            <a:solidFill>
-              <a:srgbClr val="E2E8F0"/>
-            </a:solidFill>
-          </a:ln>
-        </p:spPr>
-        <p:style>
-          <a:lnRef idx="0">
-            <a:scrgbClr r="0" g="0" b="0"/>
-          </a:lnRef>
-          <a:fillRef idx="0">
-            <a:scrgbClr r="0" g="0" b="0"/>
-          </a:fillRef>
-          <a:effectRef idx="0">
-            <a:scrgbClr r="0" g="0" b="0"/>
-          </a:effectRef>
-          <a:fontRef idx="minor"/>
-        </p:style>
-        <p:txBody>
-          <a:bodyPr lIns="91440" tIns="45720" rIns="114300" bIns="45720" anchor="ctr">
-            <a:noAutofit/>
-          </a:bodyPr>
-          <a:lstStyle/>
-          <a:p>
-            <a:pPr algn="l"/>
-            <a:r>
-              <a:rPr lang="ja-JP" sz="1100" b="0" dirty="0">
-                <a:solidFill>
-                  <a:srgbClr val="EF4444"/>
-                </a:solidFill>
-                <a:latin typeface="Noto Sans CJK JP"/>
-                <a:cs typeface="Noto Sans CJK JP"/>
-              </a:rPr>
-              <a:t>  • 交付金の規模・対象事業費／更新投資計画／三沢市の使用料</a:t>
-            </a:r>
-          </a:p>
-        </p:txBody>
-      </p:sp>
-      <p:sp>
-        <p:nvSpPr>
-          <p:cNvPr id="35" name="rec9"/>
-          <p:cNvSpPr/>
-          <p:nvPr/>
-        </p:nvSpPr>
-        <p:spPr>
-          <a:xfrm>
-            <a:off x="571680" y="4909566"/>
-            <a:ext cx="11048400" cy="1600962"/>
-          </a:xfrm>
-          <a:custGeom>
-            <a:avLst/>
-            <a:gdLst/>
-            <a:ahLst/>
-            <a:cxnLst/>
-            <a:rect l="l" t="t" r="r" b="b"/>
-            <a:pathLst>
-              <a:path w="21600" h="21600">
-                <a:moveTo>
-                  <a:pt x="0" y="0"/>
-                </a:moveTo>
-                <a:lnTo>
-                  <a:pt x="21600" y="0"/>
-                </a:lnTo>
-                <a:lnTo>
-                  <a:pt x="21600" y="21600"/>
-                </a:lnTo>
-                <a:lnTo>
-                  <a:pt x="0" y="21600"/>
-                </a:lnTo>
-                <a:close/>
-              </a:path>
-            </a:pathLst>
-          </a:custGeom>
-          <a:solidFill>
-            <a:srgbClr val="FEF9C3"/>
-          </a:solidFill>
-          <a:ln w="9525">
-            <a:solidFill>
-              <a:srgbClr val="FBBF24"/>
-            </a:solidFill>
-          </a:ln>
-        </p:spPr>
-        <p:style>
-          <a:lnRef idx="0">
-            <a:scrgbClr r="0" g="0" b="0"/>
-          </a:lnRef>
-          <a:fillRef idx="0">
-            <a:scrgbClr r="0" g="0" b="0"/>
-          </a:fillRef>
-          <a:effectRef idx="0">
-            <a:scrgbClr r="0" g="0" b="0"/>
-          </a:effectRef>
-          <a:fontRef idx="minor"/>
-        </p:style>
-        <p:txBody>
-          <a:bodyPr lIns="182880" tIns="45720" rIns="114300" bIns="45720" anchor="ctr">
-            <a:noAutofit/>
-          </a:bodyPr>
-          <a:lstStyle/>
-          <a:p>
-            <a:pPr algn="l"/>
-            <a:r>
-              <a:rPr lang="ja-JP" sz="1300" b="0" dirty="0">
-                <a:solidFill>
-                  <a:srgbClr val="78350F"/>
-                </a:solidFill>
-                <a:latin typeface="Noto Sans CJK JP"/>
-                <a:cs typeface="Noto Sans CJK JP"/>
-              </a:rPr>
-              <a:t>▶ 本別紙の数値は令和7年度決算（合計残高試算表・貸借対照表／令和8年3月31日、出力 令和8年6月16日）に基づきます。本編（37ページ）の収支シミュレーションは経営戦略の推計値ベースのままとしており、決算実績を反映して組み直すかどうかは審議会でのご判断を踏まえて対応します。</a:t>
-            </a:r>
-          </a:p>
-          <a:p>
-            <a:pPr algn="l"/>
-            <a:r>
-              <a:rPr lang="ja-JP" sz="1300" b="0" dirty="0">
-                <a:solidFill>
-                  <a:srgbClr val="78350F"/>
-                </a:solidFill>
-                <a:latin typeface="Noto Sans CJK JP"/>
-                <a:cs typeface="Noto Sans CJK JP"/>
-              </a:rPr>
-              <a:t>▶ 農集の一般会計繰入金が決算51,777千円と推計19,236千円の約2.7倍となっているのは基準外繰入金を含むためです。別紙2の試算は経営戦略の前提（基準内繰入＝資本費相当）によっています。</a:t>
-            </a:r>
-          </a:p>
-          <a:p>
-            <a:pPr algn="l"/>
-            <a:r>
-              <a:rPr lang="ja-JP" sz="1300" b="0" dirty="0">
-                <a:solidFill>
-                  <a:srgbClr val="78350F"/>
-                </a:solidFill>
-                <a:latin typeface="Noto Sans CJK JP"/>
-                <a:cs typeface="Noto Sans CJK JP"/>
-              </a:rPr>
-              <a:t>※ 突合の詳細は「R7決算突合.md」および成果物エビデンス集の「R7決算突合」「R7実績ベース試算」シートに収録しています。</a:t>
-            </a:r>
-          </a:p>
-        </p:txBody>
-      </p:sp>
-      <p:sp>
-        <p:nvSpPr>
-          <p:cNvPr id="36" name="pgnum"/>
-          <p:cNvSpPr/>
-          <p:nvPr/>
-        </p:nvSpPr>
-        <p:spPr>
-          <a:xfrm>
-            <a:off x="286200" y="6543360"/>
-            <a:ext cx="777240" cy="162720"/>
-          </a:xfrm>
-          <a:custGeom>
-            <a:avLst/>
-            <a:gdLst/>
-            <a:ahLst/>
-            <a:cxnLst/>
-            <a:rect l="l" t="t" r="r" b="b"/>
-            <a:pathLst>
-              <a:path w="21600" h="21600">
-                <a:moveTo>
-                  <a:pt x="0" y="0"/>
-                </a:moveTo>
-                <a:lnTo>
-                  <a:pt x="21600" y="0"/>
-                </a:lnTo>
-                <a:lnTo>
-                  <a:pt x="21600" y="21600"/>
-                </a:lnTo>
-                <a:lnTo>
-                  <a:pt x="0" y="21600"/>
-                </a:lnTo>
-                <a:close/>
-              </a:path>
-            </a:pathLst>
-          </a:custGeom>
-          <a:solidFill>
-            <a:srgbClr val="FFFFFF"/>
-          </a:solidFill>
-          <a:ln w="0">
-            <a:noFill/>
-          </a:ln>
-        </p:spPr>
-        <p:style>
-          <a:lnRef idx="0">
-            <a:scrgbClr r="0" g="0" b="0"/>
-          </a:lnRef>
-          <a:fillRef idx="0">
-            <a:scrgbClr r="0" g="0" b="0"/>
-          </a:fillRef>
-          <a:effectRef idx="0">
-            <a:scrgbClr r="0" g="0" b="0"/>
-          </a:effectRef>
-          <a:fontRef idx="minor"/>
-        </p:style>
-        <p:txBody>
-          <a:bodyPr lIns="0" tIns="0" rIns="0" bIns="0" anchor="ctr">
-            <a:noAutofit/>
-          </a:bodyPr>
-          <a:lstStyle/>
-          <a:p>
-            <a:pPr algn="ctr"/>
-            <a:r>
-              <a:rPr lang="ja-JP" sz="900" b="0" dirty="0">
-                <a:solidFill>
-                  <a:srgbClr val="CBD5E1"/>
-                </a:solidFill>
-                <a:latin typeface="Arial"/>
-                <a:cs typeface="Noto Sans CJK JP"/>
-              </a:rPr>
-              <a:t>別紙3</a:t>
+                <a:latin typeface="Arial"/>
+                <a:cs typeface="Noto Sans CJK JP"/>
+              </a:rPr>
+              <a:t>別紙</a:t>
             </a:r>
           </a:p>
         </p:txBody>
@@ -2981,7 +2597,7 @@
 </p:sld>
 </file>
 
-<file path=ppt/slides/slide12.xml><?xml version="1.0" encoding="utf-8"?>
+<file path=ppt/slides/slide2.xml><?xml version="1.0" encoding="utf-8"?>
 <p:sld xmlns:a="http://schemas.openxmlformats.org/drawingml/2006/main" xmlns:p="http://schemas.openxmlformats.org/presentationml/2006/main" xmlns:r="http://schemas.openxmlformats.org/officeDocument/2006/relationships">
   <p:cSld>
     <p:bg>
@@ -8232,7 +7848,7 @@
 </p:sld>
 </file>
 
-<file path=ppt/slides/slide17.xml><?xml version="1.0" encoding="utf-8"?>
+<file path=ppt/slides/slide3.xml><?xml version="1.0" encoding="utf-8"?>
 <p:sld xmlns:a="http://schemas.openxmlformats.org/drawingml/2006/main" xmlns:p="http://schemas.openxmlformats.org/presentationml/2006/main" xmlns:r="http://schemas.openxmlformats.org/officeDocument/2006/relationships">
   <p:cSld>
     <p:bg>
@@ -12936,14 +12552,14 @@
       </p:sp>
       <p:sp>
         <p:nvSpPr>
-          <p:cNvPr id="20" name="sec_panel"/>
+          <p:cNvPr id="12" name="hdr_bg"/>
           <p:cNvSpPr/>
           <p:nvPr/>
         </p:nvSpPr>
         <p:spPr>
           <a:xfrm>
             <a:off x="0" y="0"/>
-            <a:ext cx="3200000" cy="6858000"/>
+            <a:ext cx="12191760" cy="742320"/>
           </a:xfrm>
           <a:custGeom>
             <a:avLst/>
@@ -12970,7 +12586,7 @@
             </a:pathLst>
           </a:custGeom>
           <a:solidFill>
-            <a:srgbClr val="1E3A8A"/>
+            <a:srgbClr val="FFFFFF"/>
           </a:solidFill>
           <a:ln w="0">
             <a:noFill/>
@@ -13000,14 +12616,14 @@
       </p:sp>
       <p:sp>
         <p:nvSpPr>
-          <p:cNvPr id="21" name="sec_num"/>
-          <p:cNvSpPr/>
-          <p:nvPr/>
-        </p:nvSpPr>
-        <p:spPr>
-          <a:xfrm>
-            <a:off x="200000" y="2000000"/>
-            <a:ext cx="2800000" cy="1800000"/>
+          <p:cNvPr id="13" name="hdr_line"/>
+          <p:cNvSpPr/>
+          <p:nvPr/>
+        </p:nvSpPr>
+        <p:spPr>
+          <a:xfrm>
+            <a:off x="0" y="19080"/>
+            <a:ext cx="12191760" cy="19080"/>
           </a:xfrm>
           <a:custGeom>
             <a:avLst/>
@@ -13034,7 +12650,7 @@
             </a:pathLst>
           </a:custGeom>
           <a:solidFill>
-            <a:srgbClr val="1E3A8A"/>
+            <a:srgbClr val="E2E8F0"/>
           </a:solidFill>
           <a:ln w="0">
             <a:noFill/>
@@ -13058,30 +12674,20 @@
           </a:bodyPr>
           <a:lstStyle/>
           <a:p>
-            <a:pPr algn="ctr"/>
-            <a:r>
-              <a:rPr lang="ja-JP" sz="5400" b="0" dirty="0">
-                <a:solidFill>
-                  <a:srgbClr val="FFFFFF"/>
-                </a:solidFill>
-                <a:latin typeface="Arial"/>
-                <a:cs typeface="Noto Sans CJK JP"/>
-              </a:rPr>
-              <a:t>別紙</a:t>
-            </a:r>
-          </a:p>
-        </p:txBody>
-      </p:sp>
-      <p:sp>
-        <p:nvSpPr>
-          <p:cNvPr id="22" name="sec_lbl"/>
-          <p:cNvSpPr/>
-          <p:nvPr/>
-        </p:nvSpPr>
-        <p:spPr>
-          <a:xfrm>
-            <a:off x="200000" y="3850000"/>
-            <a:ext cx="2800000" cy="400000"/>
+            <a:endParaRPr/>
+          </a:p>
+        </p:txBody>
+      </p:sp>
+      <p:sp>
+        <p:nvSpPr>
+          <p:cNvPr id="14" name="hdr_accent"/>
+          <p:cNvSpPr/>
+          <p:nvPr/>
+        </p:nvSpPr>
+        <p:spPr>
+          <a:xfrm>
+            <a:off x="0" y="19080"/>
+            <a:ext cx="1904760" cy="38520"/>
           </a:xfrm>
           <a:custGeom>
             <a:avLst/>
@@ -13132,30 +12738,20 @@
           </a:bodyPr>
           <a:lstStyle/>
           <a:p>
-            <a:pPr algn="ctr"/>
-            <a:r>
-              <a:rPr lang="ja-JP" sz="1800" b="0" dirty="0">
-                <a:solidFill>
-                  <a:srgbClr val="FFFFFF"/>
-                </a:solidFill>
-                <a:latin typeface="Noto Sans CJK JP"/>
-                <a:cs typeface="Noto Sans CJK JP"/>
-              </a:rPr>
-              <a:t>APPENDIX</a:t>
-            </a:r>
-          </a:p>
-        </p:txBody>
-      </p:sp>
-      <p:sp>
-        <p:nvSpPr>
-          <p:cNvPr id="23" name="right_bg"/>
-          <p:cNvSpPr/>
-          <p:nvPr/>
-        </p:nvSpPr>
-        <p:spPr>
-          <a:xfrm>
-            <a:off x="3200000" y="0"/>
-            <a:ext cx="8991760" cy="6858000"/>
+            <a:endParaRPr/>
+          </a:p>
+        </p:txBody>
+      </p:sp>
+      <p:sp>
+        <p:nvSpPr>
+          <p:cNvPr id="16" name="ttl"/>
+          <p:cNvSpPr/>
+          <p:nvPr/>
+        </p:nvSpPr>
+        <p:spPr>
+          <a:xfrm>
+            <a:off x="819360" y="722376"/>
+            <a:ext cx="11052295" cy="700000"/>
           </a:xfrm>
           <a:custGeom>
             <a:avLst/>
@@ -13182,7 +12778,7 @@
             </a:pathLst>
           </a:custGeom>
           <a:solidFill>
-            <a:srgbClr val="EFF6FF"/>
+            <a:srgbClr val="FFFFFF"/>
           </a:solidFill>
           <a:ln w="0">
             <a:noFill/>
@@ -13201,25 +12797,35 @@
           <a:fontRef idx="minor"/>
         </p:style>
         <p:txBody>
-          <a:bodyPr lIns="114300" tIns="45720" rIns="114300" bIns="45720" anchor="ctr">
+          <a:bodyPr lIns="0" tIns="45720" rIns="114300" bIns="45720" anchor="ctr">
             <a:noAutofit/>
           </a:bodyPr>
           <a:lstStyle/>
           <a:p>
-            <a:endParaRPr/>
-          </a:p>
-        </p:txBody>
-      </p:sp>
-      <p:sp>
-        <p:nvSpPr>
-          <p:cNvPr id="24" name="sub_lbl"/>
-          <p:cNvSpPr/>
-          <p:nvPr/>
-        </p:nvSpPr>
-        <p:spPr>
-          <a:xfrm>
-            <a:off x="3600000" y="1200000"/>
-            <a:ext cx="3000000" cy="380000"/>
+            <a:pPr algn="l"/>
+            <a:r>
+              <a:rPr lang="ja-JP" sz="2700" b="0" dirty="0">
+                <a:solidFill>
+                  <a:srgbClr val="1E293B"/>
+                </a:solidFill>
+                <a:latin typeface="Arial"/>
+                <a:cs typeface="Noto Sans CJK JP"/>
+              </a:rPr>
+              <a:t>別紙3　令和7年度決算により決着した事項と、引き続き確認が必要な事項</a:t>
+            </a:r>
+          </a:p>
+        </p:txBody>
+      </p:sp>
+      <p:sp>
+        <p:nvSpPr>
+          <p:cNvPr id="17" name="ch0"/>
+          <p:cNvSpPr/>
+          <p:nvPr/>
+        </p:nvSpPr>
+        <p:spPr>
+          <a:xfrm>
+            <a:off x="571680" y="1620000"/>
+            <a:ext cx="5500000" cy="340000"/>
           </a:xfrm>
           <a:custGeom>
             <a:avLst/>
@@ -13246,7 +12852,7 @@
             </a:pathLst>
           </a:custGeom>
           <a:solidFill>
-            <a:srgbClr val="EFF6FF"/>
+            <a:srgbClr val="1D4ED8"/>
           </a:solidFill>
           <a:ln w="0">
             <a:noFill/>
@@ -13265,35 +12871,35 @@
           <a:fontRef idx="minor"/>
         </p:style>
         <p:txBody>
-          <a:bodyPr lIns="0" tIns="45720" rIns="114300" bIns="45720" anchor="ctr">
+          <a:bodyPr lIns="114300" tIns="45720" rIns="114300" bIns="45720" anchor="ctr">
             <a:noAutofit/>
           </a:bodyPr>
           <a:lstStyle/>
           <a:p>
-            <a:pPr algn="l"/>
-            <a:r>
-              <a:rPr lang="ja-JP" sz="1600" b="0" dirty="0">
-                <a:solidFill>
-                  <a:srgbClr val="1E3A8A"/>
+            <a:pPr algn="ctr"/>
+            <a:r>
+              <a:rPr lang="ja-JP" sz="1500" b="0" dirty="0">
+                <a:solidFill>
+                  <a:srgbClr val="FFFFFF"/>
                 </a:solidFill>
                 <a:latin typeface="Noto Sans CJK JP"/>
                 <a:cs typeface="Noto Sans CJK JP"/>
               </a:rPr>
-              <a:t>六戸町 下水道事業</a:t>
-            </a:r>
-          </a:p>
-        </p:txBody>
-      </p:sp>
-      <p:sp>
-        <p:nvSpPr>
-          <p:cNvPr id="25" name="main_ttl"/>
-          <p:cNvSpPr/>
-          <p:nvPr/>
-        </p:nvSpPr>
-        <p:spPr>
-          <a:xfrm>
-            <a:off x="3600000" y="1640000"/>
-            <a:ext cx="8400000" cy="1200000"/>
+              <a:t>決算により決着した事項</a:t>
+            </a:r>
+          </a:p>
+        </p:txBody>
+      </p:sp>
+      <p:sp>
+        <p:nvSpPr>
+          <p:cNvPr id="18" name="cs0"/>
+          <p:cNvSpPr/>
+          <p:nvPr/>
+        </p:nvSpPr>
+        <p:spPr>
+          <a:xfrm>
+            <a:off x="571680" y="2000000"/>
+            <a:ext cx="5500000" cy="240000"/>
           </a:xfrm>
           <a:custGeom>
             <a:avLst/>
@@ -13322,8 +12928,10 @@
           <a:solidFill>
             <a:srgbClr val="EFF6FF"/>
           </a:solidFill>
-          <a:ln w="0">
-            <a:noFill/>
+          <a:ln w="9525">
+            <a:solidFill>
+              <a:srgbClr val="E2E8F0"/>
+            </a:solidFill>
           </a:ln>
         </p:spPr>
         <p:style>
@@ -13339,35 +12947,35 @@
           <a:fontRef idx="minor"/>
         </p:style>
         <p:txBody>
-          <a:bodyPr lIns="0" tIns="0" rIns="114300" bIns="0" anchor="ctr">
+          <a:bodyPr lIns="91440" tIns="45720" rIns="114300" bIns="45720" anchor="ctr">
             <a:noAutofit/>
           </a:bodyPr>
           <a:lstStyle/>
           <a:p>
-            <a:pPr algn="l"/>
-            <a:r>
-              <a:rPr lang="ja-JP" sz="4800" b="0" dirty="0">
-                <a:solidFill>
-                  <a:srgbClr val="1E293B"/>
-                </a:solidFill>
-                <a:latin typeface="Arial"/>
-                <a:cs typeface="Noto Sans CJK JP"/>
-              </a:rPr>
-              <a:t>令和7年度決算との突合</a:t>
-            </a:r>
-          </a:p>
-        </p:txBody>
-      </p:sp>
-      <p:sp>
-        <p:nvSpPr>
-          <p:cNvPr id="26" name="acc_line"/>
-          <p:cNvSpPr/>
-          <p:nvPr/>
-        </p:nvSpPr>
-        <p:spPr>
-          <a:xfrm>
-            <a:off x="3600000" y="2880000"/>
-            <a:ext cx="600000" cy="38520"/>
+            <a:pPr algn="ctr"/>
+            <a:r>
+              <a:rPr lang="ja-JP" sz="1000" b="0" dirty="0">
+                <a:solidFill>
+                  <a:srgbClr val="1D4ED8"/>
+                </a:solidFill>
+                <a:latin typeface="Noto Sans CJK JP"/>
+                <a:cs typeface="Noto Sans CJK JP"/>
+              </a:rPr>
+              <a:t>本編の確認事項　A（維持管理費）・F（年間乗数）・M・N（基準値）</a:t>
+            </a:r>
+          </a:p>
+        </p:txBody>
+      </p:sp>
+      <p:sp>
+        <p:nvSpPr>
+          <p:cNvPr id="19" name="ph0"/>
+          <p:cNvSpPr/>
+          <p:nvPr/>
+        </p:nvSpPr>
+        <p:spPr>
+          <a:xfrm>
+            <a:off x="571680" y="2290000"/>
+            <a:ext cx="5500000" cy="270000"/>
           </a:xfrm>
           <a:custGeom>
             <a:avLst/>
@@ -13394,7 +13002,7 @@
             </a:pathLst>
           </a:custGeom>
           <a:solidFill>
-            <a:srgbClr val="3B82F6"/>
+            <a:srgbClr val="166534"/>
           </a:solidFill>
           <a:ln w="0">
             <a:noFill/>
@@ -13413,25 +13021,35 @@
           <a:fontRef idx="minor"/>
         </p:style>
         <p:txBody>
-          <a:bodyPr lIns="114300" tIns="45720" rIns="114300" bIns="45720" anchor="ctr">
+          <a:bodyPr lIns="91440" tIns="45720" rIns="114300" bIns="45720" anchor="ctr">
             <a:noAutofit/>
           </a:bodyPr>
           <a:lstStyle/>
           <a:p>
-            <a:endParaRPr/>
-          </a:p>
-        </p:txBody>
-      </p:sp>
-      <p:sp>
-        <p:nvSpPr>
-          <p:cNvPr id="27" name="desc"/>
-          <p:cNvSpPr/>
-          <p:nvPr/>
-        </p:nvSpPr>
-        <p:spPr>
-          <a:xfrm>
-            <a:off x="3600000" y="3080000"/>
-            <a:ext cx="8200000" cy="3000502"/>
+            <a:pPr algn="l"/>
+            <a:r>
+              <a:rPr lang="ja-JP" sz="1100" b="0" dirty="0">
+                <a:solidFill>
+                  <a:srgbClr val="FFFFFF"/>
+                </a:solidFill>
+                <a:latin typeface="Noto Sans CJK JP"/>
+                <a:cs typeface="Noto Sans CJK JP"/>
+              </a:rPr>
+              <a:t>✔ 決着した内容</a:t>
+            </a:r>
+          </a:p>
+        </p:txBody>
+      </p:sp>
+      <p:sp>
+        <p:nvSpPr>
+          <p:cNvPr id="20" name="p00"/>
+          <p:cNvSpPr/>
+          <p:nvPr/>
+        </p:nvSpPr>
+        <p:spPr>
+          <a:xfrm>
+            <a:off x="571680" y="2600000"/>
+            <a:ext cx="5500000" cy="340000"/>
           </a:xfrm>
           <a:custGeom>
             <a:avLst/>
@@ -13458,10 +13076,12 @@
             </a:pathLst>
           </a:custGeom>
           <a:solidFill>
-            <a:srgbClr val="EFF6FF"/>
-          </a:solidFill>
-          <a:ln w="0">
-            <a:noFill/>
+            <a:srgbClr val="F0FDF4"/>
+          </a:solidFill>
+          <a:ln w="9525">
+            <a:solidFill>
+              <a:srgbClr val="E2E8F0"/>
+            </a:solidFill>
           </a:ln>
         </p:spPr>
         <p:style>
@@ -13477,61 +13097,187 @@
           <a:fontRef idx="minor"/>
         </p:style>
         <p:txBody>
-          <a:bodyPr lIns="0" tIns="0" rIns="114300" bIns="45720" anchor="ctr">
+          <a:bodyPr lIns="91440" tIns="45720" rIns="114300" bIns="45720" anchor="ctr">
             <a:noAutofit/>
           </a:bodyPr>
           <a:lstStyle/>
           <a:p>
             <a:pPr algn="l"/>
             <a:r>
-              <a:rPr lang="ja-JP" sz="2200" b="0" dirty="0">
-                <a:solidFill>
-                  <a:srgbClr val="475569"/>
+              <a:rPr lang="ja-JP" sz="1100" b="0" dirty="0">
+                <a:solidFill>
+                  <a:srgbClr val="166534"/>
                 </a:solidFill>
                 <a:latin typeface="Noto Sans CJK JP"/>
                 <a:cs typeface="Noto Sans CJK JP"/>
               </a:rPr>
-              <a:t>本別紙は、令和7年度決算（合計残高試算表・貸借対照表／令和8年3月31日）と、本編の収支シミュレーションが前提としている経営戦略の推計値を突合したものです。</a:t>
-            </a:r>
-          </a:p>
+              <a:t>  • A 維持管理費の増加はR6→R7で＋4.7%（推計は＋40.9%）</a:t>
+            </a:r>
+          </a:p>
+        </p:txBody>
+      </p:sp>
+      <p:sp>
+        <p:nvSpPr>
+          <p:cNvPr id="21" name="p01"/>
+          <p:cNvSpPr/>
+          <p:nvPr/>
+        </p:nvSpPr>
+        <p:spPr>
+          <a:xfrm>
+            <a:off x="571680" y="2960000"/>
+            <a:ext cx="5500000" cy="340000"/>
+          </a:xfrm>
+          <a:custGeom>
+            <a:avLst/>
+            <a:gdLst/>
+            <a:ahLst/>
+            <a:cxnLst/>
+            <a:rect l="l" t="t" r="r" b="b"/>
+            <a:pathLst>
+              <a:path w="21600" h="21600">
+                <a:moveTo>
+                  <a:pt x="0" y="0"/>
+                </a:moveTo>
+                <a:lnTo>
+                  <a:pt x="21600" y="0"/>
+                </a:lnTo>
+                <a:lnTo>
+                  <a:pt x="21600" y="21600"/>
+                </a:lnTo>
+                <a:lnTo>
+                  <a:pt x="0" y="21600"/>
+                </a:lnTo>
+                <a:close/>
+              </a:path>
+            </a:pathLst>
+          </a:custGeom>
+          <a:solidFill>
+            <a:srgbClr val="F0FDF4"/>
+          </a:solidFill>
+          <a:ln w="9525">
+            <a:solidFill>
+              <a:srgbClr val="E2E8F0"/>
+            </a:solidFill>
+          </a:ln>
+        </p:spPr>
+        <p:style>
+          <a:lnRef idx="0">
+            <a:scrgbClr r="0" g="0" b="0"/>
+          </a:lnRef>
+          <a:fillRef idx="0">
+            <a:scrgbClr r="0" g="0" b="0"/>
+          </a:fillRef>
+          <a:effectRef idx="0">
+            <a:scrgbClr r="0" g="0" b="0"/>
+          </a:effectRef>
+          <a:fontRef idx="minor"/>
+        </p:style>
+        <p:txBody>
+          <a:bodyPr lIns="91440" tIns="45720" rIns="114300" bIns="45720" anchor="ctr">
+            <a:noAutofit/>
+          </a:bodyPr>
+          <a:lstStyle/>
           <a:p>
             <a:pPr algn="l"/>
             <a:r>
-              <a:rPr lang="ja-JP" sz="2200" b="0" dirty="0">
-                <a:solidFill>
-                  <a:srgbClr val="475569"/>
+              <a:rPr lang="ja-JP" sz="1100" b="0" dirty="0">
+                <a:solidFill>
+                  <a:srgbClr val="166534"/>
                 </a:solidFill>
                 <a:latin typeface="Noto Sans CJK JP"/>
                 <a:cs typeface="Noto Sans CJK JP"/>
               </a:rPr>
-              <a:t>本編（37ページ）の数値は経営戦略の推計値のままとしています。決算実績を起点に組み直した場合の指標は、別紙2に試算として示しています。</a:t>
-            </a:r>
-          </a:p>
+              <a:t>  • F 農集の基本使用料の年間乗数は×6（隔月請求）が正しい</a:t>
+            </a:r>
+          </a:p>
+        </p:txBody>
+      </p:sp>
+      <p:sp>
+        <p:nvSpPr>
+          <p:cNvPr id="22" name="p02"/>
+          <p:cNvSpPr/>
+          <p:nvPr/>
+        </p:nvSpPr>
+        <p:spPr>
+          <a:xfrm>
+            <a:off x="571680" y="3320000"/>
+            <a:ext cx="5500000" cy="340000"/>
+          </a:xfrm>
+          <a:custGeom>
+            <a:avLst/>
+            <a:gdLst/>
+            <a:ahLst/>
+            <a:cxnLst/>
+            <a:rect l="l" t="t" r="r" b="b"/>
+            <a:pathLst>
+              <a:path w="21600" h="21600">
+                <a:moveTo>
+                  <a:pt x="0" y="0"/>
+                </a:moveTo>
+                <a:lnTo>
+                  <a:pt x="21600" y="0"/>
+                </a:lnTo>
+                <a:lnTo>
+                  <a:pt x="21600" y="21600"/>
+                </a:lnTo>
+                <a:lnTo>
+                  <a:pt x="0" y="21600"/>
+                </a:lnTo>
+                <a:close/>
+              </a:path>
+            </a:pathLst>
+          </a:custGeom>
+          <a:solidFill>
+            <a:srgbClr val="F0FDF4"/>
+          </a:solidFill>
+          <a:ln w="9525">
+            <a:solidFill>
+              <a:srgbClr val="E2E8F0"/>
+            </a:solidFill>
+          </a:ln>
+        </p:spPr>
+        <p:style>
+          <a:lnRef idx="0">
+            <a:scrgbClr r="0" g="0" b="0"/>
+          </a:lnRef>
+          <a:fillRef idx="0">
+            <a:scrgbClr r="0" g="0" b="0"/>
+          </a:fillRef>
+          <a:effectRef idx="0">
+            <a:scrgbClr r="0" g="0" b="0"/>
+          </a:effectRef>
+          <a:fontRef idx="minor"/>
+        </p:style>
+        <p:txBody>
+          <a:bodyPr lIns="91440" tIns="45720" rIns="114300" bIns="45720" anchor="ctr">
+            <a:noAutofit/>
+          </a:bodyPr>
+          <a:lstStyle/>
           <a:p>
             <a:pPr algn="l"/>
             <a:r>
-              <a:rPr lang="ja-JP" sz="2200" b="0" dirty="0">
-                <a:solidFill>
-                  <a:srgbClr val="475569"/>
+              <a:rPr lang="ja-JP" sz="1100" b="0" dirty="0">
+                <a:solidFill>
+                  <a:srgbClr val="166534"/>
                 </a:solidFill>
                 <a:latin typeface="Noto Sans CJK JP"/>
                 <a:cs typeface="Noto Sans CJK JP"/>
               </a:rPr>
-              <a:t>第2回 六戸町下水道使用料審議委員会　令和8年8月19日</a:t>
-            </a:r>
-          </a:p>
-        </p:txBody>
-      </p:sp>
-      <p:sp>
-        <p:nvSpPr>
-          <p:cNvPr id="28" name="pgnum"/>
-          <p:cNvSpPr/>
-          <p:nvPr/>
-        </p:nvSpPr>
-        <p:spPr>
-          <a:xfrm>
-            <a:off x="11200000" y="6570000"/>
-            <a:ext cx="777240" cy="172800"/>
+              <a:t>  • M・N R7実績を起点にすればR6実績補正が不要となり解消</a:t>
+            </a:r>
+          </a:p>
+        </p:txBody>
+      </p:sp>
+      <p:sp>
+        <p:nvSpPr>
+          <p:cNvPr id="23" name="mh0"/>
+          <p:cNvSpPr/>
+          <p:nvPr/>
+        </p:nvSpPr>
+        <p:spPr>
+          <a:xfrm>
+            <a:off x="571680" y="3700000"/>
+            <a:ext cx="5500000" cy="270000"/>
           </a:xfrm>
           <a:custGeom>
             <a:avLst/>
@@ -13558,16 +13304,1028 @@
             </a:pathLst>
           </a:custGeom>
           <a:solidFill>
-            <a:srgbClr val="1E3A8A"/>
+            <a:srgbClr val="EF4444"/>
           </a:solidFill>
           <a:ln w="0">
             <a:noFill/>
           </a:ln>
         </p:spPr>
         <p:style>
-          <a:lnRef idx="0"/>
-          <a:fillRef idx="0"/>
-          <a:effectRef idx="0"/>
+          <a:lnRef idx="0">
+            <a:scrgbClr r="0" g="0" b="0"/>
+          </a:lnRef>
+          <a:fillRef idx="0">
+            <a:scrgbClr r="0" g="0" b="0"/>
+          </a:fillRef>
+          <a:effectRef idx="0">
+            <a:scrgbClr r="0" g="0" b="0"/>
+          </a:effectRef>
+          <a:fontRef idx="minor"/>
+        </p:style>
+        <p:txBody>
+          <a:bodyPr lIns="91440" tIns="45720" rIns="114300" bIns="45720" anchor="ctr">
+            <a:noAutofit/>
+          </a:bodyPr>
+          <a:lstStyle/>
+          <a:p>
+            <a:pPr algn="l"/>
+            <a:r>
+              <a:rPr lang="ja-JP" sz="1100" b="0" dirty="0">
+                <a:solidFill>
+                  <a:srgbClr val="FFFFFF"/>
+                </a:solidFill>
+                <a:latin typeface="Noto Sans CJK JP"/>
+                <a:cs typeface="Noto Sans CJK JP"/>
+              </a:rPr>
+              <a:t>✖ 決算からは判別できない点</a:t>
+            </a:r>
+          </a:p>
+        </p:txBody>
+      </p:sp>
+      <p:sp>
+        <p:nvSpPr>
+          <p:cNvPr id="24" name="m00"/>
+          <p:cNvSpPr/>
+          <p:nvPr/>
+        </p:nvSpPr>
+        <p:spPr>
+          <a:xfrm>
+            <a:off x="571680" y="4010000"/>
+            <a:ext cx="5500000" cy="340000"/>
+          </a:xfrm>
+          <a:custGeom>
+            <a:avLst/>
+            <a:gdLst/>
+            <a:ahLst/>
+            <a:cxnLst/>
+            <a:rect l="l" t="t" r="r" b="b"/>
+            <a:pathLst>
+              <a:path w="21600" h="21600">
+                <a:moveTo>
+                  <a:pt x="0" y="0"/>
+                </a:moveTo>
+                <a:lnTo>
+                  <a:pt x="21600" y="0"/>
+                </a:lnTo>
+                <a:lnTo>
+                  <a:pt x="21600" y="21600"/>
+                </a:lnTo>
+                <a:lnTo>
+                  <a:pt x="0" y="21600"/>
+                </a:lnTo>
+                <a:close/>
+              </a:path>
+            </a:pathLst>
+          </a:custGeom>
+          <a:solidFill>
+            <a:srgbClr val="FEF2F2"/>
+          </a:solidFill>
+          <a:ln w="9525">
+            <a:solidFill>
+              <a:srgbClr val="E2E8F0"/>
+            </a:solidFill>
+          </a:ln>
+        </p:spPr>
+        <p:style>
+          <a:lnRef idx="0">
+            <a:scrgbClr r="0" g="0" b="0"/>
+          </a:lnRef>
+          <a:fillRef idx="0">
+            <a:scrgbClr r="0" g="0" b="0"/>
+          </a:fillRef>
+          <a:effectRef idx="0">
+            <a:scrgbClr r="0" g="0" b="0"/>
+          </a:effectRef>
+          <a:fontRef idx="minor"/>
+        </p:style>
+        <p:txBody>
+          <a:bodyPr lIns="91440" tIns="45720" rIns="114300" bIns="45720" anchor="ctr">
+            <a:noAutofit/>
+          </a:bodyPr>
+          <a:lstStyle/>
+          <a:p>
+            <a:pPr algn="l"/>
+            <a:r>
+              <a:rPr lang="ja-JP" sz="1100" b="0" dirty="0">
+                <a:solidFill>
+                  <a:srgbClr val="EF4444"/>
+                </a:solidFill>
+                <a:latin typeface="Noto Sans CJK JP"/>
+                <a:cs typeface="Noto Sans CJK JP"/>
+              </a:rPr>
+              <a:t>  • 汚水処理費が推計を43,186千円下回った理由（繰延べか推計過大か）</a:t>
+            </a:r>
+          </a:p>
+        </p:txBody>
+      </p:sp>
+      <p:sp>
+        <p:nvSpPr>
+          <p:cNvPr id="25" name="m01"/>
+          <p:cNvSpPr/>
+          <p:nvPr/>
+        </p:nvSpPr>
+        <p:spPr>
+          <a:xfrm>
+            <a:off x="571680" y="4370000"/>
+            <a:ext cx="5500000" cy="340000"/>
+          </a:xfrm>
+          <a:custGeom>
+            <a:avLst/>
+            <a:gdLst/>
+            <a:ahLst/>
+            <a:cxnLst/>
+            <a:rect l="l" t="t" r="r" b="b"/>
+            <a:pathLst>
+              <a:path w="21600" h="21600">
+                <a:moveTo>
+                  <a:pt x="0" y="0"/>
+                </a:moveTo>
+                <a:lnTo>
+                  <a:pt x="21600" y="0"/>
+                </a:lnTo>
+                <a:lnTo>
+                  <a:pt x="21600" y="21600"/>
+                </a:lnTo>
+                <a:lnTo>
+                  <a:pt x="0" y="21600"/>
+                </a:lnTo>
+                <a:close/>
+              </a:path>
+            </a:pathLst>
+          </a:custGeom>
+          <a:solidFill>
+            <a:srgbClr val="FEF2F2"/>
+          </a:solidFill>
+          <a:ln w="9525">
+            <a:solidFill>
+              <a:srgbClr val="E2E8F0"/>
+            </a:solidFill>
+          </a:ln>
+        </p:spPr>
+        <p:style>
+          <a:lnRef idx="0">
+            <a:scrgbClr r="0" g="0" b="0"/>
+          </a:lnRef>
+          <a:fillRef idx="0">
+            <a:scrgbClr r="0" g="0" b="0"/>
+          </a:fillRef>
+          <a:effectRef idx="0">
+            <a:scrgbClr r="0" g="0" b="0"/>
+          </a:effectRef>
+          <a:fontRef idx="minor"/>
+        </p:style>
+        <p:txBody>
+          <a:bodyPr lIns="91440" tIns="45720" rIns="114300" bIns="45720" anchor="ctr">
+            <a:noAutofit/>
+          </a:bodyPr>
+          <a:lstStyle/>
+          <a:p>
+            <a:pPr algn="l"/>
+            <a:r>
+              <a:rPr lang="ja-JP" sz="1100" b="0" dirty="0">
+                <a:solidFill>
+                  <a:srgbClr val="EF4444"/>
+                </a:solidFill>
+                <a:latin typeface="Noto Sans CJK JP"/>
+                <a:cs typeface="Noto Sans CJK JP"/>
+              </a:rPr>
+              <a:t>  • 令和8年度以降の維持管理費の見込み（流域下水道負担金63,707千円等）</a:t>
+            </a:r>
+          </a:p>
+        </p:txBody>
+      </p:sp>
+      <p:sp>
+        <p:nvSpPr>
+          <p:cNvPr id="26" name="ch1"/>
+          <p:cNvSpPr/>
+          <p:nvPr/>
+        </p:nvSpPr>
+        <p:spPr>
+          <a:xfrm>
+            <a:off x="6271680" y="1620000"/>
+            <a:ext cx="5500000" cy="340000"/>
+          </a:xfrm>
+          <a:custGeom>
+            <a:avLst/>
+            <a:gdLst/>
+            <a:ahLst/>
+            <a:cxnLst/>
+            <a:rect l="l" t="t" r="r" b="b"/>
+            <a:pathLst>
+              <a:path w="21600" h="21600">
+                <a:moveTo>
+                  <a:pt x="0" y="0"/>
+                </a:moveTo>
+                <a:lnTo>
+                  <a:pt x="21600" y="0"/>
+                </a:lnTo>
+                <a:lnTo>
+                  <a:pt x="21600" y="21600"/>
+                </a:lnTo>
+                <a:lnTo>
+                  <a:pt x="0" y="21600"/>
+                </a:lnTo>
+                <a:close/>
+              </a:path>
+            </a:pathLst>
+          </a:custGeom>
+          <a:solidFill>
+            <a:srgbClr val="EA580C"/>
+          </a:solidFill>
+          <a:ln w="0">
+            <a:noFill/>
+          </a:ln>
+        </p:spPr>
+        <p:style>
+          <a:lnRef idx="0">
+            <a:scrgbClr r="0" g="0" b="0"/>
+          </a:lnRef>
+          <a:fillRef idx="0">
+            <a:scrgbClr r="0" g="0" b="0"/>
+          </a:fillRef>
+          <a:effectRef idx="0">
+            <a:scrgbClr r="0" g="0" b="0"/>
+          </a:effectRef>
+          <a:fontRef idx="minor"/>
+        </p:style>
+        <p:txBody>
+          <a:bodyPr lIns="114300" tIns="45720" rIns="114300" bIns="45720" anchor="ctr">
+            <a:noAutofit/>
+          </a:bodyPr>
+          <a:lstStyle/>
+          <a:p>
+            <a:pPr algn="ctr"/>
+            <a:r>
+              <a:rPr lang="ja-JP" sz="1500" b="0" dirty="0">
+                <a:solidFill>
+                  <a:srgbClr val="FFFFFF"/>
+                </a:solidFill>
+                <a:latin typeface="Noto Sans CJK JP"/>
+                <a:cs typeface="Noto Sans CJK JP"/>
+              </a:rPr>
+              <a:t>引き続き確認が必要な事項</a:t>
+            </a:r>
+          </a:p>
+        </p:txBody>
+      </p:sp>
+      <p:sp>
+        <p:nvSpPr>
+          <p:cNvPr id="27" name="cs1"/>
+          <p:cNvSpPr/>
+          <p:nvPr/>
+        </p:nvSpPr>
+        <p:spPr>
+          <a:xfrm>
+            <a:off x="6271680" y="2000000"/>
+            <a:ext cx="5500000" cy="240000"/>
+          </a:xfrm>
+          <a:custGeom>
+            <a:avLst/>
+            <a:gdLst/>
+            <a:ahLst/>
+            <a:cxnLst/>
+            <a:rect l="l" t="t" r="r" b="b"/>
+            <a:pathLst>
+              <a:path w="21600" h="21600">
+                <a:moveTo>
+                  <a:pt x="0" y="0"/>
+                </a:moveTo>
+                <a:lnTo>
+                  <a:pt x="21600" y="0"/>
+                </a:lnTo>
+                <a:lnTo>
+                  <a:pt x="21600" y="21600"/>
+                </a:lnTo>
+                <a:lnTo>
+                  <a:pt x="0" y="21600"/>
+                </a:lnTo>
+                <a:close/>
+              </a:path>
+            </a:pathLst>
+          </a:custGeom>
+          <a:solidFill>
+            <a:srgbClr val="EFF6FF"/>
+          </a:solidFill>
+          <a:ln w="9525">
+            <a:solidFill>
+              <a:srgbClr val="E2E8F0"/>
+            </a:solidFill>
+          </a:ln>
+        </p:spPr>
+        <p:style>
+          <a:lnRef idx="0">
+            <a:scrgbClr r="0" g="0" b="0"/>
+          </a:lnRef>
+          <a:fillRef idx="0">
+            <a:scrgbClr r="0" g="0" b="0"/>
+          </a:fillRef>
+          <a:effectRef idx="0">
+            <a:scrgbClr r="0" g="0" b="0"/>
+          </a:effectRef>
+          <a:fontRef idx="minor"/>
+        </p:style>
+        <p:txBody>
+          <a:bodyPr lIns="91440" tIns="45720" rIns="114300" bIns="45720" anchor="ctr">
+            <a:noAutofit/>
+          </a:bodyPr>
+          <a:lstStyle/>
+          <a:p>
+            <a:pPr algn="ctr"/>
+            <a:r>
+              <a:rPr lang="ja-JP" sz="1000" b="0" dirty="0">
+                <a:solidFill>
+                  <a:srgbClr val="EA580C"/>
+                </a:solidFill>
+                <a:latin typeface="Noto Sans CJK JP"/>
+                <a:cs typeface="Noto Sans CJK JP"/>
+              </a:rPr>
+              <a:t>本編の確認事項　O（交付金）・P（三沢市）・Q（財政指標）・R（経営改善）</a:t>
+            </a:r>
+          </a:p>
+        </p:txBody>
+      </p:sp>
+      <p:sp>
+        <p:nvSpPr>
+          <p:cNvPr id="28" name="ph1"/>
+          <p:cNvSpPr/>
+          <p:nvPr/>
+        </p:nvSpPr>
+        <p:spPr>
+          <a:xfrm>
+            <a:off x="6271680" y="2290000"/>
+            <a:ext cx="5500000" cy="270000"/>
+          </a:xfrm>
+          <a:custGeom>
+            <a:avLst/>
+            <a:gdLst/>
+            <a:ahLst/>
+            <a:cxnLst/>
+            <a:rect l="l" t="t" r="r" b="b"/>
+            <a:pathLst>
+              <a:path w="21600" h="21600">
+                <a:moveTo>
+                  <a:pt x="0" y="0"/>
+                </a:moveTo>
+                <a:lnTo>
+                  <a:pt x="21600" y="0"/>
+                </a:lnTo>
+                <a:lnTo>
+                  <a:pt x="21600" y="21600"/>
+                </a:lnTo>
+                <a:lnTo>
+                  <a:pt x="0" y="21600"/>
+                </a:lnTo>
+                <a:close/>
+              </a:path>
+            </a:pathLst>
+          </a:custGeom>
+          <a:solidFill>
+            <a:srgbClr val="166534"/>
+          </a:solidFill>
+          <a:ln w="0">
+            <a:noFill/>
+          </a:ln>
+        </p:spPr>
+        <p:style>
+          <a:lnRef idx="0">
+            <a:scrgbClr r="0" g="0" b="0"/>
+          </a:lnRef>
+          <a:fillRef idx="0">
+            <a:scrgbClr r="0" g="0" b="0"/>
+          </a:fillRef>
+          <a:effectRef idx="0">
+            <a:scrgbClr r="0" g="0" b="0"/>
+          </a:effectRef>
+          <a:fontRef idx="minor"/>
+        </p:style>
+        <p:txBody>
+          <a:bodyPr lIns="91440" tIns="45720" rIns="114300" bIns="45720" anchor="ctr">
+            <a:noAutofit/>
+          </a:bodyPr>
+          <a:lstStyle/>
+          <a:p>
+            <a:pPr algn="l"/>
+            <a:r>
+              <a:rPr lang="ja-JP" sz="1100" b="0" dirty="0">
+                <a:solidFill>
+                  <a:srgbClr val="FFFFFF"/>
+                </a:solidFill>
+                <a:latin typeface="Noto Sans CJK JP"/>
+                <a:cs typeface="Noto Sans CJK JP"/>
+              </a:rPr>
+              <a:t>✔ 決算資料から判明した事項（確認事項Q・一部解決）</a:t>
+            </a:r>
+          </a:p>
+        </p:txBody>
+      </p:sp>
+      <p:sp>
+        <p:nvSpPr>
+          <p:cNvPr id="29" name="p10"/>
+          <p:cNvSpPr/>
+          <p:nvPr/>
+        </p:nvSpPr>
+        <p:spPr>
+          <a:xfrm>
+            <a:off x="6271680" y="2600000"/>
+            <a:ext cx="5500000" cy="340000"/>
+          </a:xfrm>
+          <a:custGeom>
+            <a:avLst/>
+            <a:gdLst/>
+            <a:ahLst/>
+            <a:cxnLst/>
+            <a:rect l="l" t="t" r="r" b="b"/>
+            <a:pathLst>
+              <a:path w="21600" h="21600">
+                <a:moveTo>
+                  <a:pt x="0" y="0"/>
+                </a:moveTo>
+                <a:lnTo>
+                  <a:pt x="21600" y="0"/>
+                </a:lnTo>
+                <a:lnTo>
+                  <a:pt x="21600" y="21600"/>
+                </a:lnTo>
+                <a:lnTo>
+                  <a:pt x="0" y="21600"/>
+                </a:lnTo>
+                <a:close/>
+              </a:path>
+            </a:pathLst>
+          </a:custGeom>
+          <a:solidFill>
+            <a:srgbClr val="F0FDF4"/>
+          </a:solidFill>
+          <a:ln w="9525">
+            <a:solidFill>
+              <a:srgbClr val="E2E8F0"/>
+            </a:solidFill>
+          </a:ln>
+        </p:spPr>
+        <p:style>
+          <a:lnRef idx="0">
+            <a:scrgbClr r="0" g="0" b="0"/>
+          </a:lnRef>
+          <a:fillRef idx="0">
+            <a:scrgbClr r="0" g="0" b="0"/>
+          </a:fillRef>
+          <a:effectRef idx="0">
+            <a:scrgbClr r="0" g="0" b="0"/>
+          </a:effectRef>
+          <a:fontRef idx="minor"/>
+        </p:style>
+        <p:txBody>
+          <a:bodyPr lIns="91440" tIns="45720" rIns="114300" bIns="45720" anchor="ctr">
+            <a:noAutofit/>
+          </a:bodyPr>
+          <a:lstStyle/>
+          <a:p>
+            <a:pPr algn="l"/>
+            <a:r>
+              <a:rPr lang="ja-JP" sz="1100" b="0" dirty="0">
+                <a:solidFill>
+                  <a:srgbClr val="166534"/>
+                </a:solidFill>
+                <a:latin typeface="Noto Sans CJK JP"/>
+                <a:cs typeface="Noto Sans CJK JP"/>
+              </a:rPr>
+              <a:t>  • 企業債残高 公共1,548,034千円・農集206,675千円（R7年度末）</a:t>
+            </a:r>
+          </a:p>
+        </p:txBody>
+      </p:sp>
+      <p:sp>
+        <p:nvSpPr>
+          <p:cNvPr id="30" name="p11"/>
+          <p:cNvSpPr/>
+          <p:nvPr/>
+        </p:nvSpPr>
+        <p:spPr>
+          <a:xfrm>
+            <a:off x="6271680" y="2960000"/>
+            <a:ext cx="5500000" cy="340000"/>
+          </a:xfrm>
+          <a:custGeom>
+            <a:avLst/>
+            <a:gdLst/>
+            <a:ahLst/>
+            <a:cxnLst/>
+            <a:rect l="l" t="t" r="r" b="b"/>
+            <a:pathLst>
+              <a:path w="21600" h="21600">
+                <a:moveTo>
+                  <a:pt x="0" y="0"/>
+                </a:moveTo>
+                <a:lnTo>
+                  <a:pt x="21600" y="0"/>
+                </a:lnTo>
+                <a:lnTo>
+                  <a:pt x="21600" y="21600"/>
+                </a:lnTo>
+                <a:lnTo>
+                  <a:pt x="0" y="21600"/>
+                </a:lnTo>
+                <a:close/>
+              </a:path>
+            </a:pathLst>
+          </a:custGeom>
+          <a:solidFill>
+            <a:srgbClr val="F0FDF4"/>
+          </a:solidFill>
+          <a:ln w="9525">
+            <a:solidFill>
+              <a:srgbClr val="E2E8F0"/>
+            </a:solidFill>
+          </a:ln>
+        </p:spPr>
+        <p:style>
+          <a:lnRef idx="0">
+            <a:scrgbClr r="0" g="0" b="0"/>
+          </a:lnRef>
+          <a:fillRef idx="0">
+            <a:scrgbClr r="0" g="0" b="0"/>
+          </a:fillRef>
+          <a:effectRef idx="0">
+            <a:scrgbClr r="0" g="0" b="0"/>
+          </a:effectRef>
+          <a:fontRef idx="minor"/>
+        </p:style>
+        <p:txBody>
+          <a:bodyPr lIns="91440" tIns="45720" rIns="114300" bIns="45720" anchor="ctr">
+            <a:noAutofit/>
+          </a:bodyPr>
+          <a:lstStyle/>
+          <a:p>
+            <a:pPr algn="l"/>
+            <a:r>
+              <a:rPr lang="ja-JP" sz="1100" b="0" dirty="0">
+                <a:solidFill>
+                  <a:srgbClr val="166534"/>
+                </a:solidFill>
+                <a:latin typeface="Noto Sans CJK JP"/>
+                <a:cs typeface="Noto Sans CJK JP"/>
+              </a:rPr>
+              <a:t>  • 現金預金 公共156,044千円・農集28,477千円</a:t>
+            </a:r>
+          </a:p>
+        </p:txBody>
+      </p:sp>
+      <p:sp>
+        <p:nvSpPr>
+          <p:cNvPr id="31" name="p12"/>
+          <p:cNvSpPr/>
+          <p:nvPr/>
+        </p:nvSpPr>
+        <p:spPr>
+          <a:xfrm>
+            <a:off x="6271680" y="3320000"/>
+            <a:ext cx="5500000" cy="340000"/>
+          </a:xfrm>
+          <a:custGeom>
+            <a:avLst/>
+            <a:gdLst/>
+            <a:ahLst/>
+            <a:cxnLst/>
+            <a:rect l="l" t="t" r="r" b="b"/>
+            <a:pathLst>
+              <a:path w="21600" h="21600">
+                <a:moveTo>
+                  <a:pt x="0" y="0"/>
+                </a:moveTo>
+                <a:lnTo>
+                  <a:pt x="21600" y="0"/>
+                </a:lnTo>
+                <a:lnTo>
+                  <a:pt x="21600" y="21600"/>
+                </a:lnTo>
+                <a:lnTo>
+                  <a:pt x="0" y="21600"/>
+                </a:lnTo>
+                <a:close/>
+              </a:path>
+            </a:pathLst>
+          </a:custGeom>
+          <a:solidFill>
+            <a:srgbClr val="F0FDF4"/>
+          </a:solidFill>
+          <a:ln w="9525">
+            <a:solidFill>
+              <a:srgbClr val="E2E8F0"/>
+            </a:solidFill>
+          </a:ln>
+        </p:spPr>
+        <p:style>
+          <a:lnRef idx="0">
+            <a:scrgbClr r="0" g="0" b="0"/>
+          </a:lnRef>
+          <a:fillRef idx="0">
+            <a:scrgbClr r="0" g="0" b="0"/>
+          </a:fillRef>
+          <a:effectRef idx="0">
+            <a:scrgbClr r="0" g="0" b="0"/>
+          </a:effectRef>
+          <a:fontRef idx="minor"/>
+        </p:style>
+        <p:txBody>
+          <a:bodyPr lIns="91440" tIns="45720" rIns="114300" bIns="45720" anchor="ctr">
+            <a:noAutofit/>
+          </a:bodyPr>
+          <a:lstStyle/>
+          <a:p>
+            <a:pPr algn="l"/>
+            <a:r>
+              <a:rPr lang="ja-JP" sz="1100" b="0" dirty="0">
+                <a:solidFill>
+                  <a:srgbClr val="166534"/>
+                </a:solidFill>
+                <a:latin typeface="Noto Sans CJK JP"/>
+                <a:cs typeface="Noto Sans CJK JP"/>
+              </a:rPr>
+              <a:t>  • 未処分利益剰余金 公共102,454千円・農集4,783千円</a:t>
+            </a:r>
+          </a:p>
+        </p:txBody>
+      </p:sp>
+      <p:sp>
+        <p:nvSpPr>
+          <p:cNvPr id="32" name="mh1"/>
+          <p:cNvSpPr/>
+          <p:nvPr/>
+        </p:nvSpPr>
+        <p:spPr>
+          <a:xfrm>
+            <a:off x="6271680" y="3700000"/>
+            <a:ext cx="5500000" cy="270000"/>
+          </a:xfrm>
+          <a:custGeom>
+            <a:avLst/>
+            <a:gdLst/>
+            <a:ahLst/>
+            <a:cxnLst/>
+            <a:rect l="l" t="t" r="r" b="b"/>
+            <a:pathLst>
+              <a:path w="21600" h="21600">
+                <a:moveTo>
+                  <a:pt x="0" y="0"/>
+                </a:moveTo>
+                <a:lnTo>
+                  <a:pt x="21600" y="0"/>
+                </a:lnTo>
+                <a:lnTo>
+                  <a:pt x="21600" y="21600"/>
+                </a:lnTo>
+                <a:lnTo>
+                  <a:pt x="0" y="21600"/>
+                </a:lnTo>
+                <a:close/>
+              </a:path>
+            </a:pathLst>
+          </a:custGeom>
+          <a:solidFill>
+            <a:srgbClr val="EF4444"/>
+          </a:solidFill>
+          <a:ln w="0">
+            <a:noFill/>
+          </a:ln>
+        </p:spPr>
+        <p:style>
+          <a:lnRef idx="0">
+            <a:scrgbClr r="0" g="0" b="0"/>
+          </a:lnRef>
+          <a:fillRef idx="0">
+            <a:scrgbClr r="0" g="0" b="0"/>
+          </a:fillRef>
+          <a:effectRef idx="0">
+            <a:scrgbClr r="0" g="0" b="0"/>
+          </a:effectRef>
+          <a:fontRef idx="minor"/>
+        </p:style>
+        <p:txBody>
+          <a:bodyPr lIns="91440" tIns="45720" rIns="114300" bIns="45720" anchor="ctr">
+            <a:noAutofit/>
+          </a:bodyPr>
+          <a:lstStyle/>
+          <a:p>
+            <a:pPr algn="l"/>
+            <a:r>
+              <a:rPr lang="ja-JP" sz="1100" b="0" dirty="0">
+                <a:solidFill>
+                  <a:srgbClr val="FFFFFF"/>
+                </a:solidFill>
+                <a:latin typeface="Noto Sans CJK JP"/>
+                <a:cs typeface="Noto Sans CJK JP"/>
+              </a:rPr>
+              <a:t>✖ 未受領の資料</a:t>
+            </a:r>
+          </a:p>
+        </p:txBody>
+      </p:sp>
+      <p:sp>
+        <p:nvSpPr>
+          <p:cNvPr id="33" name="m10"/>
+          <p:cNvSpPr/>
+          <p:nvPr/>
+        </p:nvSpPr>
+        <p:spPr>
+          <a:xfrm>
+            <a:off x="6271680" y="4010000"/>
+            <a:ext cx="5500000" cy="340000"/>
+          </a:xfrm>
+          <a:custGeom>
+            <a:avLst/>
+            <a:gdLst/>
+            <a:ahLst/>
+            <a:cxnLst/>
+            <a:rect l="l" t="t" r="r" b="b"/>
+            <a:pathLst>
+              <a:path w="21600" h="21600">
+                <a:moveTo>
+                  <a:pt x="0" y="0"/>
+                </a:moveTo>
+                <a:lnTo>
+                  <a:pt x="21600" y="0"/>
+                </a:lnTo>
+                <a:lnTo>
+                  <a:pt x="21600" y="21600"/>
+                </a:lnTo>
+                <a:lnTo>
+                  <a:pt x="0" y="21600"/>
+                </a:lnTo>
+                <a:close/>
+              </a:path>
+            </a:pathLst>
+          </a:custGeom>
+          <a:solidFill>
+            <a:srgbClr val="FEF2F2"/>
+          </a:solidFill>
+          <a:ln w="9525">
+            <a:solidFill>
+              <a:srgbClr val="E2E8F0"/>
+            </a:solidFill>
+          </a:ln>
+        </p:spPr>
+        <p:style>
+          <a:lnRef idx="0">
+            <a:scrgbClr r="0" g="0" b="0"/>
+          </a:lnRef>
+          <a:fillRef idx="0">
+            <a:scrgbClr r="0" g="0" b="0"/>
+          </a:fillRef>
+          <a:effectRef idx="0">
+            <a:scrgbClr r="0" g="0" b="0"/>
+          </a:effectRef>
+          <a:fontRef idx="minor"/>
+        </p:style>
+        <p:txBody>
+          <a:bodyPr lIns="91440" tIns="45720" rIns="114300" bIns="45720" anchor="ctr">
+            <a:noAutofit/>
+          </a:bodyPr>
+          <a:lstStyle/>
+          <a:p>
+            <a:pPr algn="l"/>
+            <a:r>
+              <a:rPr lang="ja-JP" sz="1100" b="0" dirty="0">
+                <a:solidFill>
+                  <a:srgbClr val="EF4444"/>
+                </a:solidFill>
+                <a:latin typeface="Noto Sans CJK JP"/>
+                <a:cs typeface="Noto Sans CJK JP"/>
+              </a:rPr>
+              <a:t>  • 有収水量・調定口数の実績／企業債の元利償還見通し</a:t>
+            </a:r>
+          </a:p>
+        </p:txBody>
+      </p:sp>
+      <p:sp>
+        <p:nvSpPr>
+          <p:cNvPr id="34" name="m11"/>
+          <p:cNvSpPr/>
+          <p:nvPr/>
+        </p:nvSpPr>
+        <p:spPr>
+          <a:xfrm>
+            <a:off x="6271680" y="4370000"/>
+            <a:ext cx="5500000" cy="340000"/>
+          </a:xfrm>
+          <a:custGeom>
+            <a:avLst/>
+            <a:gdLst/>
+            <a:ahLst/>
+            <a:cxnLst/>
+            <a:rect l="l" t="t" r="r" b="b"/>
+            <a:pathLst>
+              <a:path w="21600" h="21600">
+                <a:moveTo>
+                  <a:pt x="0" y="0"/>
+                </a:moveTo>
+                <a:lnTo>
+                  <a:pt x="21600" y="0"/>
+                </a:lnTo>
+                <a:lnTo>
+                  <a:pt x="21600" y="21600"/>
+                </a:lnTo>
+                <a:lnTo>
+                  <a:pt x="0" y="21600"/>
+                </a:lnTo>
+                <a:close/>
+              </a:path>
+            </a:pathLst>
+          </a:custGeom>
+          <a:solidFill>
+            <a:srgbClr val="FEF2F2"/>
+          </a:solidFill>
+          <a:ln w="9525">
+            <a:solidFill>
+              <a:srgbClr val="E2E8F0"/>
+            </a:solidFill>
+          </a:ln>
+        </p:spPr>
+        <p:style>
+          <a:lnRef idx="0">
+            <a:scrgbClr r="0" g="0" b="0"/>
+          </a:lnRef>
+          <a:fillRef idx="0">
+            <a:scrgbClr r="0" g="0" b="0"/>
+          </a:fillRef>
+          <a:effectRef idx="0">
+            <a:scrgbClr r="0" g="0" b="0"/>
+          </a:effectRef>
+          <a:fontRef idx="minor"/>
+        </p:style>
+        <p:txBody>
+          <a:bodyPr lIns="91440" tIns="45720" rIns="114300" bIns="45720" anchor="ctr">
+            <a:noAutofit/>
+          </a:bodyPr>
+          <a:lstStyle/>
+          <a:p>
+            <a:pPr algn="l"/>
+            <a:r>
+              <a:rPr lang="ja-JP" sz="1100" b="0" dirty="0">
+                <a:solidFill>
+                  <a:srgbClr val="EF4444"/>
+                </a:solidFill>
+                <a:latin typeface="Noto Sans CJK JP"/>
+                <a:cs typeface="Noto Sans CJK JP"/>
+              </a:rPr>
+              <a:t>  • 交付金の規模・対象事業費／更新投資計画／三沢市の使用料</a:t>
+            </a:r>
+          </a:p>
+        </p:txBody>
+      </p:sp>
+      <p:sp>
+        <p:nvSpPr>
+          <p:cNvPr id="35" name="rec9"/>
+          <p:cNvSpPr/>
+          <p:nvPr/>
+        </p:nvSpPr>
+        <p:spPr>
+          <a:xfrm>
+            <a:off x="571680" y="4909566"/>
+            <a:ext cx="11048400" cy="1600962"/>
+          </a:xfrm>
+          <a:custGeom>
+            <a:avLst/>
+            <a:gdLst/>
+            <a:ahLst/>
+            <a:cxnLst/>
+            <a:rect l="l" t="t" r="r" b="b"/>
+            <a:pathLst>
+              <a:path w="21600" h="21600">
+                <a:moveTo>
+                  <a:pt x="0" y="0"/>
+                </a:moveTo>
+                <a:lnTo>
+                  <a:pt x="21600" y="0"/>
+                </a:lnTo>
+                <a:lnTo>
+                  <a:pt x="21600" y="21600"/>
+                </a:lnTo>
+                <a:lnTo>
+                  <a:pt x="0" y="21600"/>
+                </a:lnTo>
+                <a:close/>
+              </a:path>
+            </a:pathLst>
+          </a:custGeom>
+          <a:solidFill>
+            <a:srgbClr val="FEF9C3"/>
+          </a:solidFill>
+          <a:ln w="9525">
+            <a:solidFill>
+              <a:srgbClr val="FBBF24"/>
+            </a:solidFill>
+          </a:ln>
+        </p:spPr>
+        <p:style>
+          <a:lnRef idx="0">
+            <a:scrgbClr r="0" g="0" b="0"/>
+          </a:lnRef>
+          <a:fillRef idx="0">
+            <a:scrgbClr r="0" g="0" b="0"/>
+          </a:fillRef>
+          <a:effectRef idx="0">
+            <a:scrgbClr r="0" g="0" b="0"/>
+          </a:effectRef>
+          <a:fontRef idx="minor"/>
+        </p:style>
+        <p:txBody>
+          <a:bodyPr lIns="182880" tIns="45720" rIns="114300" bIns="45720" anchor="ctr">
+            <a:noAutofit/>
+          </a:bodyPr>
+          <a:lstStyle/>
+          <a:p>
+            <a:pPr algn="l"/>
+            <a:r>
+              <a:rPr lang="ja-JP" sz="1300" b="0" dirty="0">
+                <a:solidFill>
+                  <a:srgbClr val="78350F"/>
+                </a:solidFill>
+                <a:latin typeface="Noto Sans CJK JP"/>
+                <a:cs typeface="Noto Sans CJK JP"/>
+              </a:rPr>
+              <a:t>▶ 本別紙の数値は令和7年度決算（合計残高試算表・貸借対照表／令和8年3月31日、出力 令和8年6月16日）に基づきます。本編（37ページ）の収支シミュレーションは経営戦略の推計値ベースのままとしており、決算実績を反映して組み直すかどうかは審議会でのご判断を踏まえて対応します。</a:t>
+            </a:r>
+          </a:p>
+          <a:p>
+            <a:pPr algn="l"/>
+            <a:r>
+              <a:rPr lang="ja-JP" sz="1300" b="0" dirty="0">
+                <a:solidFill>
+                  <a:srgbClr val="78350F"/>
+                </a:solidFill>
+                <a:latin typeface="Noto Sans CJK JP"/>
+                <a:cs typeface="Noto Sans CJK JP"/>
+              </a:rPr>
+              <a:t>▶ 農集の一般会計繰入金が決算51,777千円と推計19,236千円の約2.7倍となっているのは基準外繰入金を含むためです。別紙2の試算は経営戦略の前提（基準内繰入＝資本費相当）によっています。</a:t>
+            </a:r>
+          </a:p>
+          <a:p>
+            <a:pPr algn="l"/>
+            <a:r>
+              <a:rPr lang="ja-JP" sz="1300" b="0" dirty="0">
+                <a:solidFill>
+                  <a:srgbClr val="78350F"/>
+                </a:solidFill>
+                <a:latin typeface="Noto Sans CJK JP"/>
+                <a:cs typeface="Noto Sans CJK JP"/>
+              </a:rPr>
+              <a:t>※ 突合の詳細は「R7決算突合.md」および成果物エビデンス集の「R7決算突合」「R7実績ベース試算」シートに収録しています。</a:t>
+            </a:r>
+          </a:p>
+        </p:txBody>
+      </p:sp>
+      <p:sp>
+        <p:nvSpPr>
+          <p:cNvPr id="36" name="pgnum"/>
+          <p:cNvSpPr/>
+          <p:nvPr/>
+        </p:nvSpPr>
+        <p:spPr>
+          <a:xfrm>
+            <a:off x="286200" y="6543360"/>
+            <a:ext cx="777240" cy="162720"/>
+          </a:xfrm>
+          <a:custGeom>
+            <a:avLst/>
+            <a:gdLst/>
+            <a:ahLst/>
+            <a:cxnLst/>
+            <a:rect l="l" t="t" r="r" b="b"/>
+            <a:pathLst>
+              <a:path w="21600" h="21600">
+                <a:moveTo>
+                  <a:pt x="0" y="0"/>
+                </a:moveTo>
+                <a:lnTo>
+                  <a:pt x="21600" y="0"/>
+                </a:lnTo>
+                <a:lnTo>
+                  <a:pt x="21600" y="21600"/>
+                </a:lnTo>
+                <a:lnTo>
+                  <a:pt x="0" y="21600"/>
+                </a:lnTo>
+                <a:close/>
+              </a:path>
+            </a:pathLst>
+          </a:custGeom>
+          <a:solidFill>
+            <a:srgbClr val="FFFFFF"/>
+          </a:solidFill>
+          <a:ln w="0">
+            <a:noFill/>
+          </a:ln>
+        </p:spPr>
+        <p:style>
+          <a:lnRef idx="0">
+            <a:scrgbClr r="0" g="0" b="0"/>
+          </a:lnRef>
+          <a:fillRef idx="0">
+            <a:scrgbClr r="0" g="0" b="0"/>
+          </a:fillRef>
+          <a:effectRef idx="0">
+            <a:scrgbClr r="0" g="0" b="0"/>
+          </a:effectRef>
           <a:fontRef idx="minor"/>
         </p:style>
         <p:txBody>
@@ -13578,14 +14336,14 @@
           <a:p>
             <a:pPr algn="ctr"/>
             <a:r>
-              <a:rPr lang="ja-JP" sz="900" b="1" dirty="0">
-                <a:solidFill>
-                  <a:srgbClr val="FFFFFF"/>
-                </a:solidFill>
-                <a:latin typeface="Arial"/>
-                <a:cs typeface="Noto Sans CJK JP"/>
-              </a:rPr>
-              <a:t>別紙</a:t>
+              <a:rPr lang="ja-JP" sz="900" b="0" dirty="0">
+                <a:solidFill>
+                  <a:srgbClr val="CBD5E1"/>
+                </a:solidFill>
+                <a:latin typeface="Arial"/>
+                <a:cs typeface="Noto Sans CJK JP"/>
+              </a:rPr>
+              <a:t>別紙3</a:t>
             </a:r>
           </a:p>
         </p:txBody>
@@ -13812,4 +14570,324 @@
   <a:objectDefaults/>
   <a:extraClrSchemeLst/>
 </a:theme>
+</file>
+
+<file path=ppt/theme/theme3.xml><?xml version="1.0" encoding="utf-8"?>
+<a:theme xmlns:a="http://schemas.openxmlformats.org/drawingml/2006/main" name="Office Theme">
+  <a:themeElements>
+    <a:clrScheme name="Office">
+      <a:dk1>
+        <a:sysClr val="windowText" lastClr="000000"/>
+      </a:dk1>
+      <a:lt1>
+        <a:sysClr val="window" lastClr="FFFFFF"/>
+      </a:lt1>
+      <a:dk2>
+        <a:srgbClr val="1F497D"/>
+      </a:dk2>
+      <a:lt2>
+        <a:srgbClr val="EEECE1"/>
+      </a:lt2>
+      <a:accent1>
+        <a:srgbClr val="4F81BD"/>
+      </a:accent1>
+      <a:accent2>
+        <a:srgbClr val="C0504D"/>
+      </a:accent2>
+      <a:accent3>
+        <a:srgbClr val="9BBB59"/>
+      </a:accent3>
+      <a:accent4>
+        <a:srgbClr val="8064A2"/>
+      </a:accent4>
+      <a:accent5>
+        <a:srgbClr val="4BACC6"/>
+      </a:accent5>
+      <a:accent6>
+        <a:srgbClr val="F79646"/>
+      </a:accent6>
+      <a:hlink>
+        <a:srgbClr val="0000FF"/>
+      </a:hlink>
+      <a:folHlink>
+        <a:srgbClr val="800080"/>
+      </a:folHlink>
+    </a:clrScheme>
+    <a:fontScheme name="Office">
+      <a:majorFont>
+        <a:latin typeface="Calibri"/>
+        <a:ea typeface=""/>
+        <a:cs typeface=""/>
+        <a:font script="Jpan" typeface="ＭＳ Ｐゴシック"/>
+        <a:font script="Hang" typeface="맑은 고딕"/>
+        <a:font script="Hans" typeface="宋体"/>
+        <a:font script="Hant" typeface="新細明體"/>
+        <a:font script="Arab" typeface="Times New Roman"/>
+        <a:font script="Hebr" typeface="Times New Roman"/>
+        <a:font script="Thai" typeface="Angsana New"/>
+        <a:font script="Ethi" typeface="Nyala"/>
+        <a:font script="Beng" typeface="Vrinda"/>
+        <a:font script="Gujr" typeface="Shruti"/>
+        <a:font script="Khmr" typeface="MoolBoran"/>
+        <a:font script="Knda" typeface="Tunga"/>
+        <a:font script="Guru" typeface="Raavi"/>
+        <a:font script="Cans" typeface="Euphemia"/>
+        <a:font script="Cher" typeface="Plantagenet Cherokee"/>
+        <a:font script="Yiii" typeface="Microsoft Yi Baiti"/>
+        <a:font script="Tibt" typeface="Microsoft Himalaya"/>
+        <a:font script="Thaa" typeface="MV Boli"/>
+        <a:font script="Deva" typeface="Mangal"/>
+        <a:font script="Telu" typeface="Gautami"/>
+        <a:font script="Taml" typeface="Latha"/>
+        <a:font script="Syrc" typeface="Estrangelo Edessa"/>
+        <a:font script="Orya" typeface="Kalinga"/>
+        <a:font script="Mlym" typeface="Kartika"/>
+        <a:font script="Laoo" typeface="DokChampa"/>
+        <a:font script="Sinh" typeface="Iskoola Pota"/>
+        <a:font script="Mong" typeface="Mongolian Baiti"/>
+        <a:font script="Viet" typeface="Times New Roman"/>
+        <a:font script="Uigh" typeface="Microsoft Uighur"/>
+        <a:font script="Geor" typeface="Sylfaen"/>
+      </a:majorFont>
+      <a:minorFont>
+        <a:latin typeface="Calibri"/>
+        <a:ea typeface=""/>
+        <a:cs typeface=""/>
+        <a:font script="Jpan" typeface="ＭＳ Ｐゴシック"/>
+        <a:font script="Hang" typeface="맑은 고딕"/>
+        <a:font script="Hans" typeface="宋体"/>
+        <a:font script="Hant" typeface="新細明體"/>
+        <a:font script="Arab" typeface="Arial"/>
+        <a:font script="Hebr" typeface="Arial"/>
+        <a:font script="Thai" typeface="Cordia New"/>
+        <a:font script="Ethi" typeface="Nyala"/>
+        <a:font script="Beng" typeface="Vrinda"/>
+        <a:font script="Gujr" typeface="Shruti"/>
+        <a:font script="Khmr" typeface="DaunPenh"/>
+        <a:font script="Knda" typeface="Tunga"/>
+        <a:font script="Guru" typeface="Raavi"/>
+        <a:font script="Cans" typeface="Euphemia"/>
+        <a:font script="Cher" typeface="Plantagenet Cherokee"/>
+        <a:font script="Yiii" typeface="Microsoft Yi Baiti"/>
+        <a:font script="Tibt" typeface="Microsoft Himalaya"/>
+        <a:font script="Thaa" typeface="MV Boli"/>
+        <a:font script="Deva" typeface="Mangal"/>
+        <a:font script="Telu" typeface="Gautami"/>
+        <a:font script="Taml" typeface="Latha"/>
+        <a:font script="Syrc" typeface="Estrangelo Edessa"/>
+        <a:font script="Orya" typeface="Kalinga"/>
+        <a:font script="Mlym" typeface="Kartika"/>
+        <a:font script="Laoo" typeface="DokChampa"/>
+        <a:font script="Sinh" typeface="Iskoola Pota"/>
+        <a:font script="Mong" typeface="Mongolian Baiti"/>
+        <a:font script="Viet" typeface="Arial"/>
+        <a:font script="Uigh" typeface="Microsoft Uighur"/>
+        <a:font script="Geor" typeface="Sylfaen"/>
+      </a:minorFont>
+    </a:fontScheme>
+    <a:fmtScheme name="Office">
+      <a:fillStyleLst>
+        <a:solidFill>
+          <a:schemeClr val="phClr"/>
+        </a:solidFill>
+        <a:gradFill rotWithShape="1">
+          <a:gsLst>
+            <a:gs pos="0">
+              <a:schemeClr val="phClr">
+                <a:tint val="50000"/>
+                <a:satMod val="300000"/>
+              </a:schemeClr>
+            </a:gs>
+            <a:gs pos="35000">
+              <a:schemeClr val="phClr">
+                <a:tint val="37000"/>
+                <a:satMod val="300000"/>
+              </a:schemeClr>
+            </a:gs>
+            <a:gs pos="100000">
+              <a:schemeClr val="phClr">
+                <a:tint val="15000"/>
+                <a:satMod val="350000"/>
+              </a:schemeClr>
+            </a:gs>
+          </a:gsLst>
+          <a:lin ang="16200000" scaled="1"/>
+        </a:gradFill>
+        <a:gradFill rotWithShape="1">
+          <a:gsLst>
+            <a:gs pos="0">
+              <a:schemeClr val="phClr">
+                <a:tint val="100000"/>
+                <a:shade val="100000"/>
+                <a:satMod val="130000"/>
+              </a:schemeClr>
+            </a:gs>
+            <a:gs pos="100000">
+              <a:schemeClr val="phClr">
+                <a:tint val="50000"/>
+                <a:shade val="100000"/>
+                <a:satMod val="350000"/>
+              </a:schemeClr>
+            </a:gs>
+          </a:gsLst>
+          <a:lin ang="16200000" scaled="0"/>
+        </a:gradFill>
+      </a:fillStyleLst>
+      <a:lnStyleLst>
+        <a:ln w="9525" cap="flat" cmpd="sng" algn="ctr">
+          <a:solidFill>
+            <a:schemeClr val="phClr">
+              <a:shade val="95000"/>
+              <a:satMod val="105000"/>
+            </a:schemeClr>
+          </a:solidFill>
+          <a:prstDash val="solid"/>
+        </a:ln>
+        <a:ln w="25400" cap="flat" cmpd="sng" algn="ctr">
+          <a:solidFill>
+            <a:schemeClr val="phClr"/>
+          </a:solidFill>
+          <a:prstDash val="solid"/>
+        </a:ln>
+        <a:ln w="38100" cap="flat" cmpd="sng" algn="ctr">
+          <a:solidFill>
+            <a:schemeClr val="phClr"/>
+          </a:solidFill>
+          <a:prstDash val="solid"/>
+        </a:ln>
+      </a:lnStyleLst>
+      <a:effectStyleLst>
+        <a:effectStyle>
+          <a:effectLst>
+            <a:outerShdw blurRad="40000" dist="20000" dir="5400000" rotWithShape="0">
+              <a:srgbClr val="000000">
+                <a:alpha val="38000"/>
+              </a:srgbClr>
+            </a:outerShdw>
+          </a:effectLst>
+        </a:effectStyle>
+        <a:effectStyle>
+          <a:effectLst>
+            <a:outerShdw blurRad="40000" dist="23000" dir="5400000" rotWithShape="0">
+              <a:srgbClr val="000000">
+                <a:alpha val="35000"/>
+              </a:srgbClr>
+            </a:outerShdw>
+          </a:effectLst>
+        </a:effectStyle>
+        <a:effectStyle>
+          <a:effectLst>
+            <a:outerShdw blurRad="40000" dist="23000" dir="5400000" rotWithShape="0">
+              <a:srgbClr val="000000">
+                <a:alpha val="35000"/>
+              </a:srgbClr>
+            </a:outerShdw>
+          </a:effectLst>
+          <a:scene3d>
+            <a:camera prst="orthographicFront">
+              <a:rot lat="0" lon="0" rev="0"/>
+            </a:camera>
+            <a:lightRig rig="threePt" dir="t">
+              <a:rot lat="0" lon="0" rev="1200000"/>
+            </a:lightRig>
+          </a:scene3d>
+          <a:sp3d>
+            <a:bevelT w="63500" h="25400"/>
+          </a:sp3d>
+        </a:effectStyle>
+      </a:effectStyleLst>
+      <a:bgFillStyleLst>
+        <a:solidFill>
+          <a:schemeClr val="phClr"/>
+        </a:solidFill>
+        <a:gradFill rotWithShape="1">
+          <a:gsLst>
+            <a:gs pos="0">
+              <a:schemeClr val="phClr">
+                <a:tint val="40000"/>
+                <a:satMod val="350000"/>
+              </a:schemeClr>
+            </a:gs>
+            <a:gs pos="40000">
+              <a:schemeClr val="phClr">
+                <a:tint val="45000"/>
+                <a:shade val="99000"/>
+                <a:satMod val="350000"/>
+              </a:schemeClr>
+            </a:gs>
+            <a:gs pos="100000">
+              <a:schemeClr val="phClr">
+                <a:shade val="20000"/>
+                <a:satMod val="255000"/>
+              </a:schemeClr>
+            </a:gs>
+          </a:gsLst>
+          <a:path path="circle">
+            <a:fillToRect l="50000" t="-80000" r="50000" b="180000"/>
+          </a:path>
+        </a:gradFill>
+        <a:gradFill rotWithShape="1">
+          <a:gsLst>
+            <a:gs pos="0">
+              <a:schemeClr val="phClr">
+                <a:tint val="80000"/>
+                <a:satMod val="300000"/>
+              </a:schemeClr>
+            </a:gs>
+            <a:gs pos="100000">
+              <a:schemeClr val="phClr">
+                <a:shade val="30000"/>
+                <a:satMod val="200000"/>
+              </a:schemeClr>
+            </a:gs>
+          </a:gsLst>
+          <a:path path="circle">
+            <a:fillToRect l="50000" t="50000" r="50000" b="50000"/>
+          </a:path>
+        </a:gradFill>
+      </a:bgFillStyleLst>
+    </a:fmtScheme>
+  </a:themeElements>
+  <a:objectDefaults>
+    <a:spDef>
+      <a:spPr/>
+      <a:bodyPr/>
+      <a:lstStyle/>
+      <a:style>
+        <a:lnRef idx="1">
+          <a:schemeClr val="accent1"/>
+        </a:lnRef>
+        <a:fillRef idx="3">
+          <a:schemeClr val="accent1"/>
+        </a:fillRef>
+        <a:effectRef idx="2">
+          <a:schemeClr val="accent1"/>
+        </a:effectRef>
+        <a:fontRef idx="minor">
+          <a:schemeClr val="lt1"/>
+        </a:fontRef>
+      </a:style>
+    </a:spDef>
+    <a:lnDef>
+      <a:spPr/>
+      <a:bodyPr/>
+      <a:lstStyle/>
+      <a:style>
+        <a:lnRef idx="2">
+          <a:schemeClr val="accent1"/>
+        </a:lnRef>
+        <a:fillRef idx="0">
+          <a:schemeClr val="accent1"/>
+        </a:fillRef>
+        <a:effectRef idx="1">
+          <a:schemeClr val="accent1"/>
+        </a:effectRef>
+        <a:fontRef idx="minor">
+          <a:schemeClr val="tx1"/>
+        </a:fontRef>
+      </a:style>
+    </a:lnDef>
+  </a:objectDefaults>
+  <a:extraClrSchemeLst/>
+</a:theme>
 </file>